--- a/submission/03_运行与评测包/补充案例_20260903/02_bazn2si2o7/figures/figstudio/bzso_taxonomy/deliverables/taxonomy_phase_control_en_editable.pptx
+++ b/submission/03_运行与评测包/补充案例_20260903/02_bazn2si2o7/figures/figstudio/bzso_taxonomy/deliverables/taxonomy_phase_control_en_editable.pptx
@@ -7,7 +7,7 @@
   <p:sldIdLst>
     <p:sldId id="256" r:id="rId7"/>
   </p:sldIdLst>
-  <p:sldSz cx="12191999" cy="8127999" type="screen4x3"/>
+  <p:sldSz cx="12191999" cy="8540749" type="screen4x3"/>
   <p:notesSz cx="6858000" cy="9144000"/>
   <p:defaultTextStyle>
     <a:defPPr>
@@ -502,7 +502,7 @@
           <a:lstStyle/>
           <a:p>
             <a:r>
-              <a:t>BaZn2Si2O7 · Taxonomy of synthesis and phase control (round 5, F02).</a:t>
+              <a:t>BaZn2Si2O7 合成与相控制的分类框架（第六轮：印刷字号 + 内容定尺寸；箭头一律由枢纽指向分支，全图只有一段虚线） [paper=bzso] [print_width_pt=451.4]</a:t>
             </a:r>
           </a:p>
         </p:txBody>
@@ -3524,12 +3524,12 @@
         </p:nvSpPr>
         <p:spPr>
           <a:xfrm>
-            <a:off x="285749" y="317499"/>
-            <a:ext cx="4921249" cy="7492999"/>
+            <a:off x="206374" y="206374"/>
+            <a:ext cx="4349749" cy="8127999"/>
           </a:xfrm>
           <a:prstGeom prst="roundRect">
             <a:avLst>
-              <a:gd name="adj" fmla="val 2258"/>
+              <a:gd name="adj" fmla="val 2554"/>
             </a:avLst>
           </a:prstGeom>
           <a:solidFill>
@@ -3572,8 +3572,8 @@
         </p:nvSpPr>
         <p:spPr>
           <a:xfrm>
-            <a:off x="428624" y="396874"/>
-            <a:ext cx="2468562" cy="357187"/>
+            <a:off x="349249" y="285749"/>
+            <a:ext cx="2643187" cy="380999"/>
           </a:xfrm>
           <a:prstGeom prst="rect">
             <a:avLst/>
@@ -3589,7 +3589,7 @@
           <a:p>
             <a:pPr algn="l" fontAlgn="base">
               <a:lnSpc>
-                <a:spcPts val="1906"/>
+                <a:spcPts val="2046"/>
               </a:lnSpc>
               <a:spcBef>
                 <a:spcPts val="0"/>
@@ -3597,7 +3597,7 @@
               <a:spcAft>
                 <a:spcPts val="0"/>
               </a:spcAft>
-              <a:defRPr sz="1624" b="1" i="0" lang="zh-CN" dirty="0">
+              <a:defRPr sz="1749" b="1" i="0" lang="zh-CN" dirty="0">
                 <a:solidFill>
                   <a:srgbClr val="0F4F58"/>
                 </a:solidFill>
@@ -3607,7 +3607,7 @@
               </a:defRPr>
             </a:pPr>
             <a:r>
-              <a:rPr sz="1624" b="1" i="0" lang="zh-CN" dirty="0">
+              <a:rPr sz="1749" b="1" i="0" lang="zh-CN" dirty="0">
                 <a:solidFill>
                   <a:srgbClr val="0F4F58"/>
                 </a:solidFill>
@@ -3628,12 +3628,12 @@
         </p:nvSpPr>
         <p:spPr>
           <a:xfrm>
-            <a:off x="6984999" y="317499"/>
-            <a:ext cx="4889499" cy="7492999"/>
+            <a:off x="6969124" y="206374"/>
+            <a:ext cx="5016499" cy="8127999"/>
           </a:xfrm>
           <a:prstGeom prst="roundRect">
             <a:avLst>
-              <a:gd name="adj" fmla="val 2272"/>
+              <a:gd name="adj" fmla="val 2215"/>
             </a:avLst>
           </a:prstGeom>
           <a:solidFill>
@@ -3676,8 +3676,8 @@
         </p:nvSpPr>
         <p:spPr>
           <a:xfrm>
-            <a:off x="7127874" y="396874"/>
-            <a:ext cx="2595562" cy="357187"/>
+            <a:off x="7111999" y="285749"/>
+            <a:ext cx="2778124" cy="380999"/>
           </a:xfrm>
           <a:prstGeom prst="rect">
             <a:avLst/>
@@ -3693,7 +3693,7 @@
           <a:p>
             <a:pPr algn="l" fontAlgn="base">
               <a:lnSpc>
-                <a:spcPts val="1906"/>
+                <a:spcPts val="2046"/>
               </a:lnSpc>
               <a:spcBef>
                 <a:spcPts val="0"/>
@@ -3701,7 +3701,7 @@
               <a:spcAft>
                 <a:spcPts val="0"/>
               </a:spcAft>
-              <a:defRPr sz="1624" b="1" i="0" lang="zh-CN" dirty="0">
+              <a:defRPr sz="1749" b="1" i="0" lang="zh-CN" dirty="0">
                 <a:solidFill>
                   <a:srgbClr val="2B3E57"/>
                 </a:solidFill>
@@ -3711,7 +3711,7 @@
               </a:defRPr>
             </a:pPr>
             <a:r>
-              <a:rPr sz="1624" b="1" i="0" lang="zh-CN" dirty="0">
+              <a:rPr sz="1749" b="1" i="0" lang="zh-CN" dirty="0">
                 <a:solidFill>
                   <a:srgbClr val="2B3E57"/>
                 </a:solidFill>
@@ -3732,12 +3732,12 @@
         </p:nvSpPr>
         <p:spPr>
           <a:xfrm>
-            <a:off x="5222874" y="3016249"/>
-            <a:ext cx="1746249" cy="2222499"/>
+            <a:off x="4810124" y="3754437"/>
+            <a:ext cx="1904999" cy="1904999"/>
           </a:xfrm>
           <a:prstGeom prst="roundRect">
             <a:avLst>
-              <a:gd name="adj" fmla="val 4090"/>
+              <a:gd name="adj" fmla="val 3750"/>
             </a:avLst>
           </a:prstGeom>
           <a:solidFill>
@@ -3780,7 +3780,7 @@
         </p:nvCxnSpPr>
         <p:spPr>
           <a:xfrm>
-            <a:off x="5841999" y="3476624"/>
+            <a:off x="5508624" y="4071937"/>
             <a:ext cx="508000" cy="0"/>
           </a:xfrm>
           <a:prstGeom prst="line">
@@ -3816,7 +3816,7 @@
         </p:nvCxnSpPr>
         <p:spPr>
           <a:xfrm>
-            <a:off x="5841999" y="3476624"/>
+            <a:off x="5508624" y="4071937"/>
             <a:ext cx="0" cy="508000"/>
           </a:xfrm>
           <a:prstGeom prst="line">
@@ -3852,7 +3852,7 @@
         </p:nvCxnSpPr>
         <p:spPr>
           <a:xfrm>
-            <a:off x="5841999" y="3730624"/>
+            <a:off x="5508624" y="4325937"/>
             <a:ext cx="508000" cy="0"/>
           </a:xfrm>
           <a:prstGeom prst="line">
@@ -3888,7 +3888,7 @@
         </p:nvCxnSpPr>
         <p:spPr>
           <a:xfrm>
-            <a:off x="6095999" y="3476624"/>
+            <a:off x="5762624" y="4071937"/>
             <a:ext cx="0" cy="508000"/>
           </a:xfrm>
           <a:prstGeom prst="line">
@@ -3924,7 +3924,7 @@
         </p:nvCxnSpPr>
         <p:spPr>
           <a:xfrm>
-            <a:off x="5841999" y="3984624"/>
+            <a:off x="5508624" y="4579937"/>
             <a:ext cx="508000" cy="0"/>
           </a:xfrm>
           <a:prstGeom prst="line">
@@ -3960,7 +3960,7 @@
         </p:nvCxnSpPr>
         <p:spPr>
           <a:xfrm>
-            <a:off x="6349999" y="3476624"/>
+            <a:off x="6016624" y="4071937"/>
             <a:ext cx="0" cy="508000"/>
           </a:xfrm>
           <a:prstGeom prst="line">
@@ -3996,7 +3996,7 @@
         </p:nvSpPr>
         <p:spPr>
           <a:xfrm>
-            <a:off x="5786437" y="3421062"/>
+            <a:off x="5453062" y="4016374"/>
             <a:ext cx="111124" cy="111124"/>
           </a:xfrm>
           <a:prstGeom prst="ellipse">
@@ -4040,7 +4040,7 @@
         </p:nvSpPr>
         <p:spPr>
           <a:xfrm>
-            <a:off x="5786437" y="3675062"/>
+            <a:off x="5453062" y="4270374"/>
             <a:ext cx="111124" cy="111124"/>
           </a:xfrm>
           <a:prstGeom prst="ellipse">
@@ -4084,7 +4084,7 @@
         </p:nvSpPr>
         <p:spPr>
           <a:xfrm>
-            <a:off x="5786437" y="3929062"/>
+            <a:off x="5453062" y="4524374"/>
             <a:ext cx="111124" cy="111124"/>
           </a:xfrm>
           <a:prstGeom prst="ellipse">
@@ -4128,7 +4128,7 @@
         </p:nvSpPr>
         <p:spPr>
           <a:xfrm>
-            <a:off x="6040437" y="3421062"/>
+            <a:off x="5707062" y="4016374"/>
             <a:ext cx="111124" cy="111124"/>
           </a:xfrm>
           <a:prstGeom prst="ellipse">
@@ -4172,7 +4172,7 @@
         </p:nvSpPr>
         <p:spPr>
           <a:xfrm>
-            <a:off x="6040437" y="3675062"/>
+            <a:off x="5707062" y="4270374"/>
             <a:ext cx="111124" cy="111124"/>
           </a:xfrm>
           <a:prstGeom prst="ellipse">
@@ -4216,7 +4216,7 @@
         </p:nvSpPr>
         <p:spPr>
           <a:xfrm>
-            <a:off x="6040437" y="3929062"/>
+            <a:off x="5707062" y="4524374"/>
             <a:ext cx="111124" cy="111124"/>
           </a:xfrm>
           <a:prstGeom prst="ellipse">
@@ -4260,7 +4260,7 @@
         </p:nvSpPr>
         <p:spPr>
           <a:xfrm>
-            <a:off x="6294437" y="3421062"/>
+            <a:off x="5961062" y="4016374"/>
             <a:ext cx="111124" cy="111124"/>
           </a:xfrm>
           <a:prstGeom prst="ellipse">
@@ -4304,7 +4304,7 @@
         </p:nvSpPr>
         <p:spPr>
           <a:xfrm>
-            <a:off x="6294437" y="3675062"/>
+            <a:off x="5961062" y="4270374"/>
             <a:ext cx="111124" cy="111124"/>
           </a:xfrm>
           <a:prstGeom prst="ellipse">
@@ -4348,7 +4348,7 @@
         </p:nvSpPr>
         <p:spPr>
           <a:xfrm>
-            <a:off x="6294437" y="3929062"/>
+            <a:off x="5961062" y="4524374"/>
             <a:ext cx="111124" cy="111124"/>
           </a:xfrm>
           <a:prstGeom prst="ellipse">
@@ -4392,8 +4392,8 @@
         </p:nvSpPr>
         <p:spPr>
           <a:xfrm>
-            <a:off x="5286374" y="4302124"/>
-            <a:ext cx="1619249" cy="380999"/>
+            <a:off x="4905374" y="4802187"/>
+            <a:ext cx="1714499" cy="365124"/>
           </a:xfrm>
           <a:prstGeom prst="rect">
             <a:avLst/>
@@ -4448,8 +4448,8 @@
         </p:nvSpPr>
         <p:spPr>
           <a:xfrm>
-            <a:off x="5381624" y="4714874"/>
-            <a:ext cx="1428749" cy="285749"/>
+            <a:off x="4905374" y="5167312"/>
+            <a:ext cx="1714499" cy="317499"/>
           </a:xfrm>
           <a:prstGeom prst="rect">
             <a:avLst/>
@@ -4465,7 +4465,7 @@
           <a:p>
             <a:pPr algn="ctr" fontAlgn="base">
               <a:lnSpc>
-                <a:spcPts val="1468"/>
+                <a:spcPts val="1765"/>
               </a:lnSpc>
               <a:spcBef>
                 <a:spcPts val="0"/>
@@ -4473,7 +4473,7 @@
               <a:spcAft>
                 <a:spcPts val="0"/>
               </a:spcAft>
-              <a:defRPr sz="1249" b="1" i="0" lang="zh-CN" dirty="0">
+              <a:defRPr sz="1499" b="0" i="0" lang="zh-CN" dirty="0">
                 <a:solidFill>
                   <a:srgbClr val="0F4F58"/>
                 </a:solidFill>
@@ -4483,7 +4483,7 @@
               </a:defRPr>
             </a:pPr>
             <a:r>
-              <a:rPr sz="1249" b="1" i="0" lang="zh-CN" dirty="0">
+              <a:rPr sz="1499" b="0" i="0" lang="zh-CN" dirty="0">
                 <a:solidFill>
                   <a:srgbClr val="0F4F58"/>
                 </a:solidFill>
@@ -4504,12 +4504,12 @@
         </p:nvSpPr>
         <p:spPr>
           <a:xfrm>
-            <a:off x="523874" y="952499"/>
-            <a:ext cx="3651249" cy="1396999"/>
+            <a:off x="333374" y="1222374"/>
+            <a:ext cx="3222624" cy="1349374"/>
           </a:xfrm>
           <a:prstGeom prst="roundRect">
             <a:avLst>
-              <a:gd name="adj" fmla="val 5113"/>
+              <a:gd name="adj" fmla="val 5294"/>
             </a:avLst>
           </a:prstGeom>
           <a:solidFill>
@@ -4552,12 +4552,12 @@
         </p:nvSpPr>
         <p:spPr>
           <a:xfrm>
-            <a:off x="523874" y="952499"/>
-            <a:ext cx="63499" cy="1396999"/>
+            <a:off x="333374" y="1222374"/>
+            <a:ext cx="47624" cy="1349374"/>
           </a:xfrm>
           <a:prstGeom prst="roundRect">
             <a:avLst>
-              <a:gd name="adj" fmla="val 37500"/>
+              <a:gd name="adj" fmla="val 50000"/>
             </a:avLst>
           </a:prstGeom>
           <a:solidFill>
@@ -4598,8 +4598,8 @@
         </p:nvCxnSpPr>
         <p:spPr>
           <a:xfrm>
-            <a:off x="825499" y="1357312"/>
-            <a:ext cx="269875" cy="0"/>
+            <a:off x="547687" y="1777999"/>
+            <a:ext cx="238125" cy="0"/>
           </a:xfrm>
           <a:prstGeom prst="line">
             <a:avLst/>
@@ -4634,8 +4634,8 @@
         </p:nvCxnSpPr>
         <p:spPr>
           <a:xfrm>
-            <a:off x="825499" y="1357312"/>
-            <a:ext cx="0" cy="277812"/>
+            <a:off x="547687" y="1777999"/>
+            <a:ext cx="0" cy="238125"/>
           </a:xfrm>
           <a:prstGeom prst="line">
             <a:avLst/>
@@ -4670,8 +4670,8 @@
         </p:nvCxnSpPr>
         <p:spPr>
           <a:xfrm>
-            <a:off x="825499" y="1492249"/>
-            <a:ext cx="269875" cy="0"/>
+            <a:off x="547687" y="1897062"/>
+            <a:ext cx="238125" cy="0"/>
           </a:xfrm>
           <a:prstGeom prst="line">
             <a:avLst/>
@@ -4706,8 +4706,8 @@
         </p:nvCxnSpPr>
         <p:spPr>
           <a:xfrm>
-            <a:off x="960437" y="1357312"/>
-            <a:ext cx="0" cy="277812"/>
+            <a:off x="666749" y="1777999"/>
+            <a:ext cx="0" cy="238125"/>
           </a:xfrm>
           <a:prstGeom prst="line">
             <a:avLst/>
@@ -4742,8 +4742,8 @@
         </p:nvCxnSpPr>
         <p:spPr>
           <a:xfrm>
-            <a:off x="825499" y="1635124"/>
-            <a:ext cx="269875" cy="0"/>
+            <a:off x="547687" y="2016124"/>
+            <a:ext cx="238125" cy="0"/>
           </a:xfrm>
           <a:prstGeom prst="line">
             <a:avLst/>
@@ -4778,8 +4778,8 @@
         </p:nvCxnSpPr>
         <p:spPr>
           <a:xfrm>
-            <a:off x="1095374" y="1357312"/>
-            <a:ext cx="0" cy="277812"/>
+            <a:off x="785812" y="1777999"/>
+            <a:ext cx="0" cy="238125"/>
           </a:xfrm>
           <a:prstGeom prst="line">
             <a:avLst/>
@@ -4814,8 +4814,8 @@
         </p:nvSpPr>
         <p:spPr>
           <a:xfrm>
-            <a:off x="793749" y="1325562"/>
-            <a:ext cx="63499" cy="63499"/>
+            <a:off x="515937" y="1746249"/>
+            <a:ext cx="55562" cy="55562"/>
           </a:xfrm>
           <a:prstGeom prst="ellipse">
             <a:avLst/>
@@ -4858,8 +4858,8 @@
         </p:nvSpPr>
         <p:spPr>
           <a:xfrm>
-            <a:off x="793749" y="1468437"/>
-            <a:ext cx="63499" cy="63499"/>
+            <a:off x="515937" y="1873249"/>
+            <a:ext cx="55562" cy="55562"/>
           </a:xfrm>
           <a:prstGeom prst="ellipse">
             <a:avLst/>
@@ -4902,8 +4902,8 @@
         </p:nvSpPr>
         <p:spPr>
           <a:xfrm>
-            <a:off x="793749" y="1603374"/>
-            <a:ext cx="63499" cy="63499"/>
+            <a:off x="515937" y="1992312"/>
+            <a:ext cx="55562" cy="55562"/>
           </a:xfrm>
           <a:prstGeom prst="ellipse">
             <a:avLst/>
@@ -4946,8 +4946,8 @@
         </p:nvSpPr>
         <p:spPr>
           <a:xfrm>
-            <a:off x="928687" y="1325562"/>
-            <a:ext cx="63499" cy="63499"/>
+            <a:off x="642937" y="1746249"/>
+            <a:ext cx="55562" cy="55562"/>
           </a:xfrm>
           <a:prstGeom prst="ellipse">
             <a:avLst/>
@@ -4990,8 +4990,8 @@
         </p:nvSpPr>
         <p:spPr>
           <a:xfrm>
-            <a:off x="928687" y="1468437"/>
-            <a:ext cx="63499" cy="63499"/>
+            <a:off x="642937" y="1873249"/>
+            <a:ext cx="55562" cy="55562"/>
           </a:xfrm>
           <a:prstGeom prst="ellipse">
             <a:avLst/>
@@ -5034,8 +5034,8 @@
         </p:nvSpPr>
         <p:spPr>
           <a:xfrm>
-            <a:off x="928687" y="1603374"/>
-            <a:ext cx="63499" cy="63499"/>
+            <a:off x="642937" y="1992312"/>
+            <a:ext cx="55562" cy="55562"/>
           </a:xfrm>
           <a:prstGeom prst="ellipse">
             <a:avLst/>
@@ -5078,8 +5078,8 @@
         </p:nvSpPr>
         <p:spPr>
           <a:xfrm>
-            <a:off x="1063624" y="1325562"/>
-            <a:ext cx="63499" cy="63499"/>
+            <a:off x="761999" y="1746249"/>
+            <a:ext cx="55562" cy="55562"/>
           </a:xfrm>
           <a:prstGeom prst="ellipse">
             <a:avLst/>
@@ -5122,8 +5122,8 @@
         </p:nvSpPr>
         <p:spPr>
           <a:xfrm>
-            <a:off x="1063624" y="1468437"/>
-            <a:ext cx="63499" cy="63499"/>
+            <a:off x="761999" y="1873249"/>
+            <a:ext cx="55562" cy="55562"/>
           </a:xfrm>
           <a:prstGeom prst="ellipse">
             <a:avLst/>
@@ -5166,8 +5166,8 @@
         </p:nvSpPr>
         <p:spPr>
           <a:xfrm>
-            <a:off x="1063624" y="1603374"/>
-            <a:ext cx="63499" cy="63499"/>
+            <a:off x="761999" y="1992312"/>
+            <a:ext cx="55562" cy="55562"/>
           </a:xfrm>
           <a:prstGeom prst="ellipse">
             <a:avLst/>
@@ -5210,8 +5210,8 @@
         </p:nvSpPr>
         <p:spPr>
           <a:xfrm>
-            <a:off x="1269999" y="1325562"/>
-            <a:ext cx="2746374" cy="341312"/>
+            <a:off x="936624" y="1357312"/>
+            <a:ext cx="2524124" cy="746124"/>
           </a:xfrm>
           <a:prstGeom prst="rect">
             <a:avLst/>
@@ -5227,7 +5227,7 @@
           <a:p>
             <a:pPr algn="l" fontAlgn="base">
               <a:lnSpc>
-                <a:spcPts val="1703"/>
+                <a:spcPts val="1984"/>
               </a:lnSpc>
               <a:spcBef>
                 <a:spcPts val="0"/>
@@ -5235,7 +5235,7 @@
               <a:spcAft>
                 <a:spcPts val="0"/>
               </a:spcAft>
-              <a:defRPr sz="1457" b="1" i="0" lang="zh-CN" dirty="0">
+              <a:defRPr sz="1687" b="1" i="0" lang="zh-CN" dirty="0">
                 <a:solidFill>
                   <a:srgbClr val="0F4F58"/>
                 </a:solidFill>
@@ -5245,7 +5245,7 @@
               </a:defRPr>
             </a:pPr>
             <a:r>
-              <a:rPr sz="1457" b="1" i="0" lang="zh-CN" dirty="0">
+              <a:rPr sz="1687" b="1" i="0" lang="zh-CN" dirty="0">
                 <a:solidFill>
                   <a:srgbClr val="0F4F58"/>
                 </a:solidFill>
@@ -5253,37 +5253,13 @@
                 <a:ea typeface="DejaVu Sans"/>
                 <a:cs typeface="DejaVu Sans"/>
               </a:rPr>
-              <a:t>Structure and Polymorphs</a:t>
+              <a:t>Structure and </a:t>
             </a:r>
           </a:p>
-        </p:txBody>
-      </p:sp>
-      <p:sp>
-        <p:nvSpPr>
-          <p:cNvPr id="42" name="e1_s" descr="Editable text; source id e1_s"/>
-          <p:cNvSpPr txBox="1"/>
-          <p:nvPr/>
-        </p:nvSpPr>
-        <p:spPr>
-          <a:xfrm>
-            <a:off x="1269999" y="1698624"/>
-            <a:ext cx="2746374" cy="277812"/>
-          </a:xfrm>
-          <a:prstGeom prst="rect">
-            <a:avLst/>
-          </a:prstGeom>
-          <a:noFill/>
-          <a:effectLst/>
-        </p:spPr>
-        <p:txBody>
-          <a:bodyPr wrap="none" anchor="ctr" tIns="0" rIns="0" bIns="0" lIns="0" anchorCtr="0" vertOverflow="overflow">
-            <a:noAutofit/>
-          </a:bodyPr>
-          <a:lstStyle/>
           <a:p>
             <a:pPr algn="l" fontAlgn="base">
               <a:lnSpc>
-                <a:spcPts val="1468"/>
+                <a:spcPts val="1984"/>
               </a:lnSpc>
               <a:spcBef>
                 <a:spcPts val="0"/>
@@ -5291,7 +5267,63 @@
               <a:spcAft>
                 <a:spcPts val="0"/>
               </a:spcAft>
-              <a:defRPr sz="1249" b="1" i="0" lang="zh-CN" dirty="0">
+              <a:defRPr sz="1687" b="1" i="0" lang="zh-CN" dirty="0">
+                <a:solidFill>
+                  <a:srgbClr val="0F4F58"/>
+                </a:solidFill>
+                <a:latin typeface="DejaVu Sans"/>
+                <a:ea typeface="DejaVu Sans"/>
+                <a:cs typeface="DejaVu Sans"/>
+              </a:defRPr>
+            </a:pPr>
+            <a:r>
+              <a:rPr sz="1687" b="1" i="0" lang="zh-CN" dirty="0">
+                <a:solidFill>
+                  <a:srgbClr val="0F4F58"/>
+                </a:solidFill>
+                <a:latin typeface="DejaVu Sans"/>
+                <a:ea typeface="DejaVu Sans"/>
+                <a:cs typeface="DejaVu Sans"/>
+              </a:rPr>
+              <a:t>Polymorphs</a:t>
+            </a:r>
+          </a:p>
+        </p:txBody>
+      </p:sp>
+      <p:sp>
+        <p:nvSpPr>
+          <p:cNvPr id="42" name="e1_s" descr="Editable text; source id e1_s"/>
+          <p:cNvSpPr txBox="1"/>
+          <p:nvPr/>
+        </p:nvSpPr>
+        <p:spPr>
+          <a:xfrm>
+            <a:off x="936624" y="2119312"/>
+            <a:ext cx="2524124" cy="317499"/>
+          </a:xfrm>
+          <a:prstGeom prst="rect">
+            <a:avLst/>
+          </a:prstGeom>
+          <a:noFill/>
+          <a:effectLst/>
+        </p:spPr>
+        <p:txBody>
+          <a:bodyPr wrap="none" anchor="ctr" tIns="0" rIns="0" bIns="0" lIns="0" anchorCtr="0" vertOverflow="overflow">
+            <a:noAutofit/>
+          </a:bodyPr>
+          <a:lstStyle/>
+          <a:p>
+            <a:pPr algn="l" fontAlgn="base">
+              <a:lnSpc>
+                <a:spcPts val="1765"/>
+              </a:lnSpc>
+              <a:spcBef>
+                <a:spcPts val="0"/>
+              </a:spcBef>
+              <a:spcAft>
+                <a:spcPts val="0"/>
+              </a:spcAft>
+              <a:defRPr sz="1499" b="0" i="0" lang="zh-CN" dirty="0">
                 <a:solidFill>
                   <a:srgbClr val="27303A"/>
                 </a:solidFill>
@@ -5301,7 +5333,7 @@
               </a:defRPr>
             </a:pPr>
             <a:r>
-              <a:rPr sz="1249" b="1" i="0" lang="zh-CN" dirty="0">
+              <a:rPr sz="1499" b="0" i="0" lang="zh-CN" dirty="0">
                 <a:solidFill>
                   <a:srgbClr val="27303A"/>
                 </a:solidFill>
@@ -5322,12 +5354,12 @@
         </p:nvSpPr>
         <p:spPr>
           <a:xfrm>
-            <a:off x="523874" y="2619374"/>
-            <a:ext cx="3651249" cy="1396999"/>
+            <a:off x="333374" y="3095624"/>
+            <a:ext cx="3222624" cy="1349374"/>
           </a:xfrm>
           <a:prstGeom prst="roundRect">
             <a:avLst>
-              <a:gd name="adj" fmla="val 5113"/>
+              <a:gd name="adj" fmla="val 5294"/>
             </a:avLst>
           </a:prstGeom>
           <a:solidFill>
@@ -5370,12 +5402,12 @@
         </p:nvSpPr>
         <p:spPr>
           <a:xfrm>
-            <a:off x="523874" y="2619374"/>
-            <a:ext cx="63499" cy="1396999"/>
+            <a:off x="333374" y="3095624"/>
+            <a:ext cx="47624" cy="1349374"/>
           </a:xfrm>
           <a:prstGeom prst="roundRect">
             <a:avLst>
-              <a:gd name="adj" fmla="val 37500"/>
+              <a:gd name="adj" fmla="val 50000"/>
             </a:avLst>
           </a:prstGeom>
           <a:solidFill>
@@ -5416,8 +5448,8 @@
         </p:nvCxnSpPr>
         <p:spPr>
           <a:xfrm>
-            <a:off x="920749" y="2992437"/>
-            <a:ext cx="0" cy="119062"/>
+            <a:off x="627062" y="3619499"/>
+            <a:ext cx="0" cy="103188"/>
           </a:xfrm>
           <a:prstGeom prst="line">
             <a:avLst/>
@@ -5452,8 +5484,8 @@
         </p:nvCxnSpPr>
         <p:spPr>
           <a:xfrm flipH="1">
-            <a:off x="809624" y="3111499"/>
-            <a:ext cx="111125" cy="214313"/>
+            <a:off x="531812" y="3722687"/>
+            <a:ext cx="95250" cy="190500"/>
           </a:xfrm>
           <a:prstGeom prst="line">
             <a:avLst/>
@@ -5488,8 +5520,8 @@
         </p:nvCxnSpPr>
         <p:spPr>
           <a:xfrm>
-            <a:off x="809624" y="3325812"/>
-            <a:ext cx="301625" cy="0"/>
+            <a:off x="531812" y="3913187"/>
+            <a:ext cx="269875" cy="0"/>
           </a:xfrm>
           <a:prstGeom prst="line">
             <a:avLst/>
@@ -5524,8 +5556,8 @@
         </p:nvCxnSpPr>
         <p:spPr>
           <a:xfrm flipH="1" flipV="1">
-            <a:off x="1000124" y="3111499"/>
-            <a:ext cx="111125" cy="214313"/>
+            <a:off x="706437" y="3722687"/>
+            <a:ext cx="95250" cy="190500"/>
           </a:xfrm>
           <a:prstGeom prst="line">
             <a:avLst/>
@@ -5560,8 +5592,8 @@
         </p:nvCxnSpPr>
         <p:spPr>
           <a:xfrm flipV="1">
-            <a:off x="1000124" y="2992437"/>
-            <a:ext cx="0" cy="119062"/>
+            <a:off x="706437" y="3619499"/>
+            <a:ext cx="0" cy="103188"/>
           </a:xfrm>
           <a:prstGeom prst="line">
             <a:avLst/>
@@ -5596,8 +5628,8 @@
         </p:nvCxnSpPr>
         <p:spPr>
           <a:xfrm>
-            <a:off x="896937" y="2992437"/>
-            <a:ext cx="127000" cy="0"/>
+            <a:off x="611187" y="3619499"/>
+            <a:ext cx="111125" cy="0"/>
           </a:xfrm>
           <a:prstGeom prst="line">
             <a:avLst/>
@@ -5632,7 +5664,7 @@
         </p:nvSpPr>
         <p:spPr>
           <a:xfrm>
-            <a:off x="912812" y="3230562"/>
+            <a:off x="619124" y="3833812"/>
             <a:ext cx="31749" cy="31749"/>
           </a:xfrm>
           <a:prstGeom prst="ellipse">
@@ -5676,7 +5708,7 @@
         </p:nvSpPr>
         <p:spPr>
           <a:xfrm>
-            <a:off x="984249" y="3262312"/>
+            <a:off x="682624" y="3857624"/>
             <a:ext cx="23812" cy="23812"/>
           </a:xfrm>
           <a:prstGeom prst="ellipse">
@@ -5720,8 +5752,8 @@
         </p:nvSpPr>
         <p:spPr>
           <a:xfrm>
-            <a:off x="1269999" y="2992437"/>
-            <a:ext cx="2746374" cy="341312"/>
+            <a:off x="936624" y="3230562"/>
+            <a:ext cx="2524124" cy="746124"/>
           </a:xfrm>
           <a:prstGeom prst="rect">
             <a:avLst/>
@@ -5737,7 +5769,7 @@
           <a:p>
             <a:pPr algn="l" fontAlgn="base">
               <a:lnSpc>
-                <a:spcPts val="1828"/>
+                <a:spcPts val="1984"/>
               </a:lnSpc>
               <a:spcBef>
                 <a:spcPts val="0"/>
@@ -5745,7 +5777,7 @@
               <a:spcAft>
                 <a:spcPts val="0"/>
               </a:spcAft>
-              <a:defRPr sz="1562" b="1" i="0" lang="zh-CN" dirty="0">
+              <a:defRPr sz="1687" b="1" i="0" lang="zh-CN" dirty="0">
                 <a:solidFill>
                   <a:srgbClr val="0F4F58"/>
                 </a:solidFill>
@@ -5755,7 +5787,7 @@
               </a:defRPr>
             </a:pPr>
             <a:r>
-              <a:rPr sz="1562" b="1" i="0" lang="zh-CN" dirty="0">
+              <a:rPr sz="1687" b="1" i="0" lang="zh-CN" dirty="0">
                 <a:solidFill>
                   <a:srgbClr val="0F4F58"/>
                 </a:solidFill>
@@ -5776,8 +5808,8 @@
         </p:nvSpPr>
         <p:spPr>
           <a:xfrm>
-            <a:off x="1269999" y="3365499"/>
-            <a:ext cx="2746374" cy="277812"/>
+            <a:off x="936624" y="3992562"/>
+            <a:ext cx="2524124" cy="317499"/>
           </a:xfrm>
           <a:prstGeom prst="rect">
             <a:avLst/>
@@ -5793,7 +5825,7 @@
           <a:p>
             <a:pPr algn="l" fontAlgn="base">
               <a:lnSpc>
-                <a:spcPts val="1468"/>
+                <a:spcPts val="1765"/>
               </a:lnSpc>
               <a:spcBef>
                 <a:spcPts val="0"/>
@@ -5801,7 +5833,7 @@
               <a:spcAft>
                 <a:spcPts val="0"/>
               </a:spcAft>
-              <a:defRPr sz="1249" b="1" i="0" lang="zh-CN" dirty="0">
+              <a:defRPr sz="1499" b="0" i="0" lang="zh-CN" dirty="0">
                 <a:solidFill>
                   <a:srgbClr val="27303A"/>
                 </a:solidFill>
@@ -5811,7 +5843,7 @@
               </a:defRPr>
             </a:pPr>
             <a:r>
-              <a:rPr sz="1249" b="1" i="0" lang="zh-CN" dirty="0">
+              <a:rPr sz="1499" b="0" i="0" lang="zh-CN" dirty="0">
                 <a:solidFill>
                   <a:srgbClr val="27303A"/>
                 </a:solidFill>
@@ -5832,12 +5864,12 @@
         </p:nvSpPr>
         <p:spPr>
           <a:xfrm>
-            <a:off x="523874" y="4286249"/>
-            <a:ext cx="3651249" cy="1396999"/>
+            <a:off x="333374" y="4968874"/>
+            <a:ext cx="3222624" cy="1349374"/>
           </a:xfrm>
           <a:prstGeom prst="roundRect">
             <a:avLst>
-              <a:gd name="adj" fmla="val 5113"/>
+              <a:gd name="adj" fmla="val 5294"/>
             </a:avLst>
           </a:prstGeom>
           <a:solidFill>
@@ -5880,12 +5912,12 @@
         </p:nvSpPr>
         <p:spPr>
           <a:xfrm>
-            <a:off x="523874" y="4286249"/>
-            <a:ext cx="63499" cy="1396999"/>
+            <a:off x="333374" y="4968874"/>
+            <a:ext cx="47624" cy="1349374"/>
           </a:xfrm>
           <a:prstGeom prst="roundRect">
             <a:avLst>
-              <a:gd name="adj" fmla="val 37500"/>
+              <a:gd name="adj" fmla="val 50000"/>
             </a:avLst>
           </a:prstGeom>
           <a:solidFill>
@@ -5926,12 +5958,12 @@
         </p:nvSpPr>
         <p:spPr>
           <a:xfrm>
-            <a:off x="920749" y="4651374"/>
-            <a:ext cx="87312" cy="246062"/>
+            <a:off x="627062" y="5484812"/>
+            <a:ext cx="79374" cy="222249"/>
           </a:xfrm>
           <a:prstGeom prst="roundRect">
             <a:avLst>
-              <a:gd name="adj" fmla="val 49090"/>
+              <a:gd name="adj" fmla="val 48000"/>
             </a:avLst>
           </a:prstGeom>
           <a:noFill/>
@@ -5972,8 +6004,8 @@
         </p:nvSpPr>
         <p:spPr>
           <a:xfrm>
-            <a:off x="888999" y="4889499"/>
-            <a:ext cx="134937" cy="134937"/>
+            <a:off x="603249" y="5699124"/>
+            <a:ext cx="119062" cy="119062"/>
           </a:xfrm>
           <a:prstGeom prst="ellipse">
             <a:avLst/>
@@ -6016,8 +6048,8 @@
         </p:nvCxnSpPr>
         <p:spPr>
           <a:xfrm>
-            <a:off x="1008062" y="4714874"/>
-            <a:ext cx="55562" cy="0"/>
+            <a:off x="714374" y="5548312"/>
+            <a:ext cx="47625" cy="0"/>
           </a:xfrm>
           <a:prstGeom prst="line">
             <a:avLst/>
@@ -6052,8 +6084,8 @@
         </p:nvCxnSpPr>
         <p:spPr>
           <a:xfrm>
-            <a:off x="1008062" y="4770437"/>
-            <a:ext cx="55562" cy="0"/>
+            <a:off x="714374" y="5587999"/>
+            <a:ext cx="47625" cy="0"/>
           </a:xfrm>
           <a:prstGeom prst="line">
             <a:avLst/>
@@ -6088,8 +6120,8 @@
         </p:nvCxnSpPr>
         <p:spPr>
           <a:xfrm>
-            <a:off x="1008062" y="4818062"/>
-            <a:ext cx="55562" cy="0"/>
+            <a:off x="714374" y="5635624"/>
+            <a:ext cx="47625" cy="0"/>
           </a:xfrm>
           <a:prstGeom prst="line">
             <a:avLst/>
@@ -6124,8 +6156,8 @@
         </p:nvSpPr>
         <p:spPr>
           <a:xfrm>
-            <a:off x="1269999" y="4659312"/>
-            <a:ext cx="2746374" cy="341312"/>
+            <a:off x="936624" y="5103812"/>
+            <a:ext cx="2524124" cy="746124"/>
           </a:xfrm>
           <a:prstGeom prst="rect">
             <a:avLst/>
@@ -6141,7 +6173,7 @@
           <a:p>
             <a:pPr algn="l" fontAlgn="base">
               <a:lnSpc>
-                <a:spcPts val="1640"/>
+                <a:spcPts val="1984"/>
               </a:lnSpc>
               <a:spcBef>
                 <a:spcPts val="0"/>
@@ -6149,7 +6181,7 @@
               <a:spcAft>
                 <a:spcPts val="0"/>
               </a:spcAft>
-              <a:defRPr sz="1394" b="1" i="0" lang="zh-CN" dirty="0">
+              <a:defRPr sz="1687" b="1" i="0" lang="zh-CN" dirty="0">
                 <a:solidFill>
                   <a:srgbClr val="0F4F58"/>
                 </a:solidFill>
@@ -6159,7 +6191,7 @@
               </a:defRPr>
             </a:pPr>
             <a:r>
-              <a:rPr sz="1394" b="1" i="0" lang="zh-CN" dirty="0">
+              <a:rPr sz="1687" b="1" i="0" lang="zh-CN" dirty="0">
                 <a:solidFill>
                   <a:srgbClr val="0F4F58"/>
                 </a:solidFill>
@@ -6167,37 +6199,13 @@
                 <a:ea typeface="DejaVu Sans"/>
                 <a:cs typeface="DejaVu Sans"/>
               </a:rPr>
-              <a:t>Composition and Annealing</a:t>
+              <a:t>Composition and </a:t>
             </a:r>
           </a:p>
-        </p:txBody>
-      </p:sp>
-      <p:sp>
-        <p:nvSpPr>
-          <p:cNvPr id="63" name="e3_s" descr="Editable text; source id e3_s"/>
-          <p:cNvSpPr txBox="1"/>
-          <p:nvPr/>
-        </p:nvSpPr>
-        <p:spPr>
-          <a:xfrm>
-            <a:off x="1269999" y="5032374"/>
-            <a:ext cx="2746374" cy="277812"/>
-          </a:xfrm>
-          <a:prstGeom prst="rect">
-            <a:avLst/>
-          </a:prstGeom>
-          <a:noFill/>
-          <a:effectLst/>
-        </p:spPr>
-        <p:txBody>
-          <a:bodyPr wrap="none" anchor="ctr" tIns="0" rIns="0" bIns="0" lIns="0" anchorCtr="0" vertOverflow="overflow">
-            <a:noAutofit/>
-          </a:bodyPr>
-          <a:lstStyle/>
           <a:p>
             <a:pPr algn="l" fontAlgn="base">
               <a:lnSpc>
-                <a:spcPts val="1468"/>
+                <a:spcPts val="1984"/>
               </a:lnSpc>
               <a:spcBef>
                 <a:spcPts val="0"/>
@@ -6205,7 +6213,63 @@
               <a:spcAft>
                 <a:spcPts val="0"/>
               </a:spcAft>
-              <a:defRPr sz="1249" b="1" i="0" lang="zh-CN" dirty="0">
+              <a:defRPr sz="1687" b="1" i="0" lang="zh-CN" dirty="0">
+                <a:solidFill>
+                  <a:srgbClr val="0F4F58"/>
+                </a:solidFill>
+                <a:latin typeface="DejaVu Sans"/>
+                <a:ea typeface="DejaVu Sans"/>
+                <a:cs typeface="DejaVu Sans"/>
+              </a:defRPr>
+            </a:pPr>
+            <a:r>
+              <a:rPr sz="1687" b="1" i="0" lang="zh-CN" dirty="0">
+                <a:solidFill>
+                  <a:srgbClr val="0F4F58"/>
+                </a:solidFill>
+                <a:latin typeface="DejaVu Sans"/>
+                <a:ea typeface="DejaVu Sans"/>
+                <a:cs typeface="DejaVu Sans"/>
+              </a:rPr>
+              <a:t>Annealing</a:t>
+            </a:r>
+          </a:p>
+        </p:txBody>
+      </p:sp>
+      <p:sp>
+        <p:nvSpPr>
+          <p:cNvPr id="63" name="e3_s" descr="Editable text; source id e3_s"/>
+          <p:cNvSpPr txBox="1"/>
+          <p:nvPr/>
+        </p:nvSpPr>
+        <p:spPr>
+          <a:xfrm>
+            <a:off x="936624" y="5865812"/>
+            <a:ext cx="2524124" cy="317499"/>
+          </a:xfrm>
+          <a:prstGeom prst="rect">
+            <a:avLst/>
+          </a:prstGeom>
+          <a:noFill/>
+          <a:effectLst/>
+        </p:spPr>
+        <p:txBody>
+          <a:bodyPr wrap="none" anchor="ctr" tIns="0" rIns="0" bIns="0" lIns="0" anchorCtr="0" vertOverflow="overflow">
+            <a:noAutofit/>
+          </a:bodyPr>
+          <a:lstStyle/>
+          <a:p>
+            <a:pPr algn="l" fontAlgn="base">
+              <a:lnSpc>
+                <a:spcPts val="1765"/>
+              </a:lnSpc>
+              <a:spcBef>
+                <a:spcPts val="0"/>
+              </a:spcBef>
+              <a:spcAft>
+                <a:spcPts val="0"/>
+              </a:spcAft>
+              <a:defRPr sz="1499" b="0" i="0" lang="zh-CN" dirty="0">
                 <a:solidFill>
                   <a:srgbClr val="27303A"/>
                 </a:solidFill>
@@ -6215,7 +6279,7 @@
               </a:defRPr>
             </a:pPr>
             <a:r>
-              <a:rPr sz="1249" b="1" i="0" lang="zh-CN" dirty="0">
+              <a:rPr sz="1499" b="0" i="0" lang="zh-CN" dirty="0">
                 <a:solidFill>
                   <a:srgbClr val="27303A"/>
                 </a:solidFill>
@@ -6236,12 +6300,12 @@
         </p:nvSpPr>
         <p:spPr>
           <a:xfrm>
-            <a:off x="523874" y="5953124"/>
-            <a:ext cx="3651249" cy="1396999"/>
+            <a:off x="333374" y="6842124"/>
+            <a:ext cx="3222624" cy="1349374"/>
           </a:xfrm>
           <a:prstGeom prst="roundRect">
             <a:avLst>
-              <a:gd name="adj" fmla="val 5113"/>
+              <a:gd name="adj" fmla="val 5294"/>
             </a:avLst>
           </a:prstGeom>
           <a:solidFill>
@@ -6284,12 +6348,12 @@
         </p:nvSpPr>
         <p:spPr>
           <a:xfrm>
-            <a:off x="523874" y="5953124"/>
-            <a:ext cx="63499" cy="1396999"/>
+            <a:off x="333374" y="6842124"/>
+            <a:ext cx="47624" cy="1349374"/>
           </a:xfrm>
           <a:prstGeom prst="roundRect">
             <a:avLst>
-              <a:gd name="adj" fmla="val 37500"/>
+              <a:gd name="adj" fmla="val 50000"/>
             </a:avLst>
           </a:prstGeom>
           <a:solidFill>
@@ -6330,8 +6394,8 @@
         </p:nvCxnSpPr>
         <p:spPr>
           <a:xfrm flipH="1" flipV="1">
-            <a:off x="849312" y="6476999"/>
-            <a:ext cx="63500" cy="198438"/>
+            <a:off x="571499" y="7500937"/>
+            <a:ext cx="47625" cy="174625"/>
           </a:xfrm>
           <a:prstGeom prst="line">
             <a:avLst/>
@@ -6366,8 +6430,8 @@
         </p:nvCxnSpPr>
         <p:spPr>
           <a:xfrm flipV="1">
-            <a:off x="849312" y="6365874"/>
-            <a:ext cx="71437" cy="111125"/>
+            <a:off x="571499" y="7405687"/>
+            <a:ext cx="55563" cy="95250"/>
           </a:xfrm>
           <a:prstGeom prst="line">
             <a:avLst/>
@@ -6402,8 +6466,8 @@
         </p:nvCxnSpPr>
         <p:spPr>
           <a:xfrm>
-            <a:off x="920749" y="6365874"/>
-            <a:ext cx="47625" cy="127000"/>
+            <a:off x="627062" y="7405687"/>
+            <a:ext cx="47625" cy="111125"/>
           </a:xfrm>
           <a:prstGeom prst="line">
             <a:avLst/>
@@ -6438,8 +6502,8 @@
         </p:nvCxnSpPr>
         <p:spPr>
           <a:xfrm flipH="1">
-            <a:off x="912812" y="6492874"/>
-            <a:ext cx="55562" cy="182563"/>
+            <a:off x="619124" y="7516812"/>
+            <a:ext cx="55563" cy="158750"/>
           </a:xfrm>
           <a:prstGeom prst="line">
             <a:avLst/>
@@ -6474,8 +6538,8 @@
         </p:nvCxnSpPr>
         <p:spPr>
           <a:xfrm flipH="1" flipV="1">
-            <a:off x="976312" y="6516687"/>
-            <a:ext cx="31750" cy="158750"/>
+            <a:off x="682624" y="7532687"/>
+            <a:ext cx="31750" cy="142875"/>
           </a:xfrm>
           <a:prstGeom prst="line">
             <a:avLst/>
@@ -6510,8 +6574,8 @@
         </p:nvCxnSpPr>
         <p:spPr>
           <a:xfrm flipV="1">
-            <a:off x="976312" y="6429374"/>
-            <a:ext cx="63500" cy="87313"/>
+            <a:off x="682624" y="7453312"/>
+            <a:ext cx="55563" cy="79375"/>
           </a:xfrm>
           <a:prstGeom prst="line">
             <a:avLst/>
@@ -6546,8 +6610,8 @@
         </p:nvCxnSpPr>
         <p:spPr>
           <a:xfrm>
-            <a:off x="1039812" y="6429374"/>
-            <a:ext cx="47625" cy="103188"/>
+            <a:off x="738187" y="7453312"/>
+            <a:ext cx="39687" cy="95250"/>
           </a:xfrm>
           <a:prstGeom prst="line">
             <a:avLst/>
@@ -6582,8 +6646,8 @@
         </p:nvCxnSpPr>
         <p:spPr>
           <a:xfrm flipH="1">
-            <a:off x="1055687" y="6532562"/>
-            <a:ext cx="31750" cy="142875"/>
+            <a:off x="754062" y="7548562"/>
+            <a:ext cx="23812" cy="127000"/>
           </a:xfrm>
           <a:prstGeom prst="line">
             <a:avLst/>
@@ -6618,8 +6682,8 @@
         </p:nvSpPr>
         <p:spPr>
           <a:xfrm>
-            <a:off x="1269999" y="6326187"/>
-            <a:ext cx="2746374" cy="341312"/>
+            <a:off x="936624" y="6977062"/>
+            <a:ext cx="2524124" cy="746124"/>
           </a:xfrm>
           <a:prstGeom prst="rect">
             <a:avLst/>
@@ -6635,7 +6699,7 @@
           <a:p>
             <a:pPr algn="l" fontAlgn="base">
               <a:lnSpc>
-                <a:spcPts val="1828"/>
+                <a:spcPts val="1984"/>
               </a:lnSpc>
               <a:spcBef>
                 <a:spcPts val="0"/>
@@ -6643,7 +6707,7 @@
               <a:spcAft>
                 <a:spcPts val="0"/>
               </a:spcAft>
-              <a:defRPr sz="1562" b="1" i="0" lang="zh-CN" dirty="0">
+              <a:defRPr sz="1687" b="1" i="0" lang="zh-CN" dirty="0">
                 <a:solidFill>
                   <a:srgbClr val="0F4F58"/>
                 </a:solidFill>
@@ -6653,7 +6717,7 @@
               </a:defRPr>
             </a:pPr>
             <a:r>
-              <a:rPr sz="1562" b="1" i="0" lang="zh-CN" dirty="0">
+              <a:rPr sz="1687" b="1" i="0" lang="zh-CN" dirty="0">
                 <a:solidFill>
                   <a:srgbClr val="0F4F58"/>
                 </a:solidFill>
@@ -6674,8 +6738,8 @@
         </p:nvSpPr>
         <p:spPr>
           <a:xfrm>
-            <a:off x="1269999" y="6699249"/>
-            <a:ext cx="2746374" cy="277812"/>
+            <a:off x="936624" y="7739062"/>
+            <a:ext cx="2524124" cy="317499"/>
           </a:xfrm>
           <a:prstGeom prst="rect">
             <a:avLst/>
@@ -6691,7 +6755,7 @@
           <a:p>
             <a:pPr algn="l" fontAlgn="base">
               <a:lnSpc>
-                <a:spcPts val="1468"/>
+                <a:spcPts val="1765"/>
               </a:lnSpc>
               <a:spcBef>
                 <a:spcPts val="0"/>
@@ -6699,7 +6763,7 @@
               <a:spcAft>
                 <a:spcPts val="0"/>
               </a:spcAft>
-              <a:defRPr sz="1249" b="1" i="0" lang="zh-CN" dirty="0">
+              <a:defRPr sz="1499" b="0" i="0" lang="zh-CN" dirty="0">
                 <a:solidFill>
                   <a:srgbClr val="27303A"/>
                 </a:solidFill>
@@ -6709,7 +6773,7 @@
               </a:defRPr>
             </a:pPr>
             <a:r>
-              <a:rPr sz="1249" b="1" i="0" lang="zh-CN" dirty="0">
+              <a:rPr sz="1499" b="0" i="0" lang="zh-CN" dirty="0">
                 <a:solidFill>
                   <a:srgbClr val="27303A"/>
                 </a:solidFill>
@@ -6730,12 +6794,12 @@
         </p:nvSpPr>
         <p:spPr>
           <a:xfrm>
-            <a:off x="7778749" y="1190624"/>
-            <a:ext cx="3889374" cy="1587499"/>
+            <a:off x="7969249" y="1222374"/>
+            <a:ext cx="3889374" cy="1523999"/>
           </a:xfrm>
           <a:prstGeom prst="roundRect">
             <a:avLst>
-              <a:gd name="adj" fmla="val 4500"/>
+              <a:gd name="adj" fmla="val 4687"/>
             </a:avLst>
           </a:prstGeom>
           <a:solidFill>
@@ -6778,12 +6842,12 @@
         </p:nvSpPr>
         <p:spPr>
           <a:xfrm>
-            <a:off x="7778749" y="1190624"/>
-            <a:ext cx="63499" cy="1587499"/>
+            <a:off x="7969249" y="1222374"/>
+            <a:ext cx="47624" cy="1523999"/>
           </a:xfrm>
           <a:prstGeom prst="roundRect">
             <a:avLst>
-              <a:gd name="adj" fmla="val 37500"/>
+              <a:gd name="adj" fmla="val 50000"/>
             </a:avLst>
           </a:prstGeom>
           <a:solidFill>
@@ -6824,8 +6888,8 @@
         </p:nvSpPr>
         <p:spPr>
           <a:xfrm>
-            <a:off x="8151812" y="1650999"/>
-            <a:ext cx="119062" cy="119062"/>
+            <a:off x="8247062" y="1825624"/>
+            <a:ext cx="103187" cy="103187"/>
           </a:xfrm>
           <a:prstGeom prst="rect">
             <a:avLst/>
@@ -6868,8 +6932,8 @@
         </p:nvSpPr>
         <p:spPr>
           <a:xfrm>
-            <a:off x="8024812" y="1873249"/>
-            <a:ext cx="119062" cy="119062"/>
+            <a:off x="8135937" y="2024062"/>
+            <a:ext cx="103187" cy="103187"/>
           </a:xfrm>
           <a:prstGeom prst="rect">
             <a:avLst/>
@@ -6912,8 +6976,8 @@
         </p:nvSpPr>
         <p:spPr>
           <a:xfrm>
-            <a:off x="8286749" y="1873249"/>
-            <a:ext cx="119062" cy="119062"/>
+            <a:off x="8366124" y="2024062"/>
+            <a:ext cx="103187" cy="103187"/>
           </a:xfrm>
           <a:prstGeom prst="rect">
             <a:avLst/>
@@ -6956,8 +7020,8 @@
         </p:nvCxnSpPr>
         <p:spPr>
           <a:xfrm flipH="1">
-            <a:off x="8088312" y="1770062"/>
-            <a:ext cx="127000" cy="103187"/>
+            <a:off x="8191499" y="1928812"/>
+            <a:ext cx="111125" cy="95250"/>
           </a:xfrm>
           <a:prstGeom prst="line">
             <a:avLst/>
@@ -6992,8 +7056,8 @@
         </p:nvCxnSpPr>
         <p:spPr>
           <a:xfrm>
-            <a:off x="8215312" y="1770062"/>
-            <a:ext cx="127000" cy="103187"/>
+            <a:off x="8302624" y="1928812"/>
+            <a:ext cx="111125" cy="95250"/>
           </a:xfrm>
           <a:prstGeom prst="line">
             <a:avLst/>
@@ -7028,8 +7092,64 @@
         </p:nvSpPr>
         <p:spPr>
           <a:xfrm>
-            <a:off x="8524874" y="1666874"/>
-            <a:ext cx="2984499" cy="325437"/>
+            <a:off x="8572499" y="1635124"/>
+            <a:ext cx="3190874" cy="365124"/>
+          </a:xfrm>
+          <a:prstGeom prst="rect">
+            <a:avLst/>
+          </a:prstGeom>
+          <a:noFill/>
+          <a:effectLst/>
+        </p:spPr>
+        <p:txBody>
+          <a:bodyPr wrap="none" anchor="ctr" tIns="0" rIns="0" bIns="0" lIns="0" anchorCtr="0" vertOverflow="overflow">
+            <a:noAutofit/>
+          </a:bodyPr>
+          <a:lstStyle/>
+          <a:p>
+            <a:pPr algn="l" fontAlgn="base">
+              <a:lnSpc>
+                <a:spcPts val="1984"/>
+              </a:lnSpc>
+              <a:spcBef>
+                <a:spcPts val="0"/>
+              </a:spcBef>
+              <a:spcAft>
+                <a:spcPts val="0"/>
+              </a:spcAft>
+              <a:defRPr sz="1687" b="1" i="0" lang="zh-CN" dirty="0">
+                <a:solidFill>
+                  <a:srgbClr val="2B3E57"/>
+                </a:solidFill>
+                <a:latin typeface="DejaVu Sans"/>
+                <a:ea typeface="DejaVu Sans"/>
+                <a:cs typeface="DejaVu Sans"/>
+              </a:defRPr>
+            </a:pPr>
+            <a:r>
+              <a:rPr sz="1687" b="1" i="0" lang="zh-CN" dirty="0">
+                <a:solidFill>
+                  <a:srgbClr val="2B3E57"/>
+                </a:solidFill>
+                <a:latin typeface="DejaVu Sans"/>
+                <a:ea typeface="DejaVu Sans"/>
+                <a:cs typeface="DejaVu Sans"/>
+              </a:rPr>
+              <a:t>Neighbor Systems</a:t>
+            </a:r>
+          </a:p>
+        </p:txBody>
+      </p:sp>
+      <p:sp>
+        <p:nvSpPr>
+          <p:cNvPr id="84" name="l1_s" descr="Editable text; source id l1_s"/>
+          <p:cNvSpPr txBox="1"/>
+          <p:nvPr/>
+        </p:nvSpPr>
+        <p:spPr>
+          <a:xfrm>
+            <a:off x="8572499" y="2016124"/>
+            <a:ext cx="3190874" cy="317499"/>
           </a:xfrm>
           <a:prstGeom prst="rect">
             <a:avLst/>
@@ -7053,7 +7173,204 @@
               <a:spcAft>
                 <a:spcPts val="0"/>
               </a:spcAft>
-              <a:defRPr sz="1499" b="1" i="0" lang="zh-CN" dirty="0">
+              <a:defRPr sz="1499" b="0" i="0" lang="zh-CN" dirty="0">
+                <a:solidFill>
+                  <a:srgbClr val="27303A"/>
+                </a:solidFill>
+                <a:latin typeface="DejaVu Sans"/>
+                <a:ea typeface="DejaVu Sans"/>
+                <a:cs typeface="DejaVu Sans"/>
+              </a:defRPr>
+            </a:pPr>
+            <a:r>
+              <a:rPr sz="1499" b="0" i="0" lang="zh-CN" dirty="0">
+                <a:solidFill>
+                  <a:srgbClr val="27303A"/>
+                </a:solidFill>
+                <a:latin typeface="DejaVu Sans"/>
+                <a:ea typeface="DejaVu Sans"/>
+                <a:cs typeface="DejaVu Sans"/>
+              </a:rPr>
+              <a:t>Ba2ZnSi2O7 family</a:t>
+            </a:r>
+          </a:p>
+        </p:txBody>
+      </p:sp>
+      <p:sp>
+        <p:nvSpPr>
+          <p:cNvPr id="85" name="l2" descr="Editable shape; source id l2"/>
+          <p:cNvSpPr/>
+          <p:nvPr/>
+        </p:nvSpPr>
+        <p:spPr>
+          <a:xfrm>
+            <a:off x="7969249" y="3944937"/>
+            <a:ext cx="3889374" cy="1523999"/>
+          </a:xfrm>
+          <a:prstGeom prst="roundRect">
+            <a:avLst>
+              <a:gd name="adj" fmla="val 4687"/>
+            </a:avLst>
+          </a:prstGeom>
+          <a:solidFill>
+            <a:srgbClr val="FFFFFF"/>
+          </a:solidFill>
+          <a:ln w="15081">
+            <a:solidFill>
+              <a:srgbClr val="5B7592"/>
+            </a:solidFill>
+          </a:ln>
+          <a:effectLst/>
+        </p:spPr>
+        <p:style>
+          <a:lnRef idx="1">
+            <a:schemeClr val="accent1"/>
+          </a:lnRef>
+          <a:fillRef idx="3">
+            <a:schemeClr val="accent1"/>
+          </a:fillRef>
+          <a:effectRef idx="0">
+            <a:schemeClr val="accent1"/>
+          </a:effectRef>
+          <a:fontRef idx="minor">
+            <a:schemeClr val="lt1"/>
+          </a:fontRef>
+        </p:style>
+        <p:txBody>
+          <a:bodyPr rtlCol="0" anchor="ctr"/>
+          <a:lstStyle/>
+          <a:p>
+            <a:pPr algn="ctr"/>
+          </a:p>
+        </p:txBody>
+      </p:sp>
+      <p:sp>
+        <p:nvSpPr>
+          <p:cNvPr id="86" name="l2_b" descr="Editable shape; source id l2_b"/>
+          <p:cNvSpPr/>
+          <p:nvPr/>
+        </p:nvSpPr>
+        <p:spPr>
+          <a:xfrm>
+            <a:off x="7969249" y="3944937"/>
+            <a:ext cx="47624" cy="1523999"/>
+          </a:xfrm>
+          <a:prstGeom prst="roundRect">
+            <a:avLst>
+              <a:gd name="adj" fmla="val 50000"/>
+            </a:avLst>
+          </a:prstGeom>
+          <a:solidFill>
+            <a:srgbClr val="5B7592"/>
+          </a:solidFill>
+          <a:ln>
+            <a:noFill/>
+          </a:ln>
+          <a:effectLst/>
+        </p:spPr>
+        <p:style>
+          <a:lnRef idx="1">
+            <a:schemeClr val="accent1"/>
+          </a:lnRef>
+          <a:fillRef idx="3">
+            <a:schemeClr val="accent1"/>
+          </a:fillRef>
+          <a:effectRef idx="0">
+            <a:schemeClr val="accent1"/>
+          </a:effectRef>
+          <a:fontRef idx="minor">
+            <a:schemeClr val="lt1"/>
+          </a:fontRef>
+        </p:style>
+        <p:txBody>
+          <a:bodyPr rtlCol="0" anchor="ctr"/>
+          <a:lstStyle/>
+          <a:p>
+            <a:pPr algn="ctr"/>
+          </a:p>
+        </p:txBody>
+      </p:sp>
+      <p:sp>
+        <p:nvSpPr>
+          <p:cNvPr id="87" name="l2_g_b" descr="Editable shape; source id l2_g_b"/>
+          <p:cNvSpPr/>
+          <p:nvPr/>
+        </p:nvSpPr>
+        <p:spPr>
+          <a:xfrm>
+            <a:off x="8159749" y="4595812"/>
+            <a:ext cx="285749" cy="238124"/>
+          </a:xfrm>
+          <a:prstGeom prst="rect">
+            <a:avLst/>
+          </a:prstGeom>
+          <a:noFill/>
+          <a:ln w="18216">
+            <a:solidFill>
+              <a:srgbClr val="111A24"/>
+            </a:solidFill>
+            <a:custDash>
+              <a:ds d="146405" sp="125490"/>
+            </a:custDash>
+          </a:ln>
+          <a:effectLst/>
+        </p:spPr>
+        <p:style>
+          <a:lnRef idx="1">
+            <a:schemeClr val="accent1"/>
+          </a:lnRef>
+          <a:fillRef idx="3">
+            <a:schemeClr val="accent1"/>
+          </a:fillRef>
+          <a:effectRef idx="0">
+            <a:schemeClr val="accent1"/>
+          </a:effectRef>
+          <a:fontRef idx="minor">
+            <a:schemeClr val="lt1"/>
+          </a:fontRef>
+        </p:style>
+        <p:txBody>
+          <a:bodyPr rtlCol="0" anchor="ctr"/>
+          <a:lstStyle/>
+          <a:p>
+            <a:pPr algn="ctr"/>
+          </a:p>
+        </p:txBody>
+      </p:sp>
+      <p:sp>
+        <p:nvSpPr>
+          <p:cNvPr id="88" name="l2_t" descr="Editable text; source id l2_t"/>
+          <p:cNvSpPr txBox="1"/>
+          <p:nvPr/>
+        </p:nvSpPr>
+        <p:spPr>
+          <a:xfrm>
+            <a:off x="8572499" y="4357687"/>
+            <a:ext cx="3190874" cy="365124"/>
+          </a:xfrm>
+          <a:prstGeom prst="rect">
+            <a:avLst/>
+          </a:prstGeom>
+          <a:noFill/>
+          <a:effectLst/>
+        </p:spPr>
+        <p:txBody>
+          <a:bodyPr wrap="none" anchor="ctr" tIns="0" rIns="0" bIns="0" lIns="0" anchorCtr="0" vertOverflow="overflow">
+            <a:noAutofit/>
+          </a:bodyPr>
+          <a:lstStyle/>
+          <a:p>
+            <a:pPr algn="l" fontAlgn="base">
+              <a:lnSpc>
+                <a:spcPts val="1984"/>
+              </a:lnSpc>
+              <a:spcBef>
+                <a:spcPts val="0"/>
+              </a:spcBef>
+              <a:spcAft>
+                <a:spcPts val="0"/>
+              </a:spcAft>
+              <a:defRPr sz="1687" b="1" i="0" lang="zh-CN" dirty="0">
                 <a:solidFill>
                   <a:srgbClr val="2B3E57"/>
                 </a:solidFill>
@@ -7063,7 +7380,7 @@
               </a:defRPr>
             </a:pPr>
             <a:r>
-              <a:rPr sz="1499" b="1" i="0" lang="zh-CN" dirty="0">
+              <a:rPr sz="1687" b="1" i="0" lang="zh-CN" dirty="0">
                 <a:solidFill>
                   <a:srgbClr val="2B3E57"/>
                 </a:solidFill>
@@ -7071,218 +7388,21 @@
                 <a:ea typeface="DejaVu Sans"/>
                 <a:cs typeface="DejaVu Sans"/>
               </a:rPr>
-              <a:t>Neighbor Systems</a:t>
+              <a:t>Evidence Boundary</a:t>
             </a:r>
           </a:p>
         </p:txBody>
       </p:sp>
       <p:sp>
         <p:nvSpPr>
-          <p:cNvPr id="84" name="l1_s" descr="Editable text; source id l1_s"/>
+          <p:cNvPr id="89" name="l2_s" descr="Editable text; source id l2_s"/>
           <p:cNvSpPr txBox="1"/>
           <p:nvPr/>
         </p:nvSpPr>
         <p:spPr>
           <a:xfrm>
-            <a:off x="8524874" y="2024062"/>
-            <a:ext cx="2984499" cy="277812"/>
-          </a:xfrm>
-          <a:prstGeom prst="rect">
-            <a:avLst/>
-          </a:prstGeom>
-          <a:noFill/>
-          <a:effectLst/>
-        </p:spPr>
-        <p:txBody>
-          <a:bodyPr wrap="none" anchor="ctr" tIns="0" rIns="0" bIns="0" lIns="0" anchorCtr="0" vertOverflow="overflow">
-            <a:noAutofit/>
-          </a:bodyPr>
-          <a:lstStyle/>
-          <a:p>
-            <a:pPr algn="l" fontAlgn="base">
-              <a:lnSpc>
-                <a:spcPts val="1468"/>
-              </a:lnSpc>
-              <a:spcBef>
-                <a:spcPts val="0"/>
-              </a:spcBef>
-              <a:spcAft>
-                <a:spcPts val="0"/>
-              </a:spcAft>
-              <a:defRPr sz="1249" b="1" i="0" lang="zh-CN" dirty="0">
-                <a:solidFill>
-                  <a:srgbClr val="27303A"/>
-                </a:solidFill>
-                <a:latin typeface="DejaVu Sans"/>
-                <a:ea typeface="DejaVu Sans"/>
-                <a:cs typeface="DejaVu Sans"/>
-              </a:defRPr>
-            </a:pPr>
-            <a:r>
-              <a:rPr sz="1249" b="1" i="0" lang="zh-CN" dirty="0">
-                <a:solidFill>
-                  <a:srgbClr val="27303A"/>
-                </a:solidFill>
-                <a:latin typeface="DejaVu Sans"/>
-                <a:ea typeface="DejaVu Sans"/>
-                <a:cs typeface="DejaVu Sans"/>
-              </a:rPr>
-              <a:t>Ba2ZnSi2O7 family</a:t>
-            </a:r>
-          </a:p>
-        </p:txBody>
-      </p:sp>
-      <p:sp>
-        <p:nvSpPr>
-          <p:cNvPr id="85" name="l2" descr="Editable shape; source id l2"/>
-          <p:cNvSpPr/>
-          <p:nvPr/>
-        </p:nvSpPr>
-        <p:spPr>
-          <a:xfrm>
-            <a:off x="7778749" y="3413124"/>
-            <a:ext cx="3889374" cy="1587499"/>
-          </a:xfrm>
-          <a:prstGeom prst="roundRect">
-            <a:avLst>
-              <a:gd name="adj" fmla="val 4500"/>
-            </a:avLst>
-          </a:prstGeom>
-          <a:solidFill>
-            <a:srgbClr val="FFFFFF"/>
-          </a:solidFill>
-          <a:ln w="15081">
-            <a:solidFill>
-              <a:srgbClr val="5B7592"/>
-            </a:solidFill>
-          </a:ln>
-          <a:effectLst/>
-        </p:spPr>
-        <p:style>
-          <a:lnRef idx="1">
-            <a:schemeClr val="accent1"/>
-          </a:lnRef>
-          <a:fillRef idx="3">
-            <a:schemeClr val="accent1"/>
-          </a:fillRef>
-          <a:effectRef idx="0">
-            <a:schemeClr val="accent1"/>
-          </a:effectRef>
-          <a:fontRef idx="minor">
-            <a:schemeClr val="lt1"/>
-          </a:fontRef>
-        </p:style>
-        <p:txBody>
-          <a:bodyPr rtlCol="0" anchor="ctr"/>
-          <a:lstStyle/>
-          <a:p>
-            <a:pPr algn="ctr"/>
-          </a:p>
-        </p:txBody>
-      </p:sp>
-      <p:sp>
-        <p:nvSpPr>
-          <p:cNvPr id="86" name="l2_b" descr="Editable shape; source id l2_b"/>
-          <p:cNvSpPr/>
-          <p:nvPr/>
-        </p:nvSpPr>
-        <p:spPr>
-          <a:xfrm>
-            <a:off x="7778749" y="3413124"/>
-            <a:ext cx="63499" cy="1587499"/>
-          </a:xfrm>
-          <a:prstGeom prst="roundRect">
-            <a:avLst>
-              <a:gd name="adj" fmla="val 37500"/>
-            </a:avLst>
-          </a:prstGeom>
-          <a:solidFill>
-            <a:srgbClr val="5B7592"/>
-          </a:solidFill>
-          <a:ln>
-            <a:noFill/>
-          </a:ln>
-          <a:effectLst/>
-        </p:spPr>
-        <p:style>
-          <a:lnRef idx="1">
-            <a:schemeClr val="accent1"/>
-          </a:lnRef>
-          <a:fillRef idx="3">
-            <a:schemeClr val="accent1"/>
-          </a:fillRef>
-          <a:effectRef idx="0">
-            <a:schemeClr val="accent1"/>
-          </a:effectRef>
-          <a:fontRef idx="minor">
-            <a:schemeClr val="lt1"/>
-          </a:fontRef>
-        </p:style>
-        <p:txBody>
-          <a:bodyPr rtlCol="0" anchor="ctr"/>
-          <a:lstStyle/>
-          <a:p>
-            <a:pPr algn="ctr"/>
-          </a:p>
-        </p:txBody>
-      </p:sp>
-      <p:sp>
-        <p:nvSpPr>
-          <p:cNvPr id="87" name="l2_g_b" descr="Editable shape; source id l2_g_b"/>
-          <p:cNvSpPr/>
-          <p:nvPr/>
-        </p:nvSpPr>
-        <p:spPr>
-          <a:xfrm>
-            <a:off x="8048624" y="3921124"/>
-            <a:ext cx="325437" cy="261937"/>
-          </a:xfrm>
-          <a:prstGeom prst="rect">
-            <a:avLst/>
-          </a:prstGeom>
-          <a:noFill/>
-          <a:ln w="18216">
-            <a:solidFill>
-              <a:srgbClr val="111A24"/>
-            </a:solidFill>
-            <a:custDash>
-              <a:ds d="164706" sp="141176"/>
-            </a:custDash>
-          </a:ln>
-          <a:effectLst/>
-        </p:spPr>
-        <p:style>
-          <a:lnRef idx="1">
-            <a:schemeClr val="accent1"/>
-          </a:lnRef>
-          <a:fillRef idx="3">
-            <a:schemeClr val="accent1"/>
-          </a:fillRef>
-          <a:effectRef idx="0">
-            <a:schemeClr val="accent1"/>
-          </a:effectRef>
-          <a:fontRef idx="minor">
-            <a:schemeClr val="lt1"/>
-          </a:fontRef>
-        </p:style>
-        <p:txBody>
-          <a:bodyPr rtlCol="0" anchor="ctr"/>
-          <a:lstStyle/>
-          <a:p>
-            <a:pPr algn="ctr"/>
-          </a:p>
-        </p:txBody>
-      </p:sp>
-      <p:sp>
-        <p:nvSpPr>
-          <p:cNvPr id="88" name="l2_t" descr="Editable text; source id l2_t"/>
-          <p:cNvSpPr txBox="1"/>
-          <p:nvPr/>
-        </p:nvSpPr>
-        <p:spPr>
-          <a:xfrm>
-            <a:off x="8524874" y="3889374"/>
-            <a:ext cx="2984499" cy="325437"/>
+            <a:off x="8572499" y="4738687"/>
+            <a:ext cx="3190874" cy="317499"/>
           </a:xfrm>
           <a:prstGeom prst="rect">
             <a:avLst/>
@@ -7306,63 +7426,7 @@
               <a:spcAft>
                 <a:spcPts val="0"/>
               </a:spcAft>
-              <a:defRPr sz="1499" b="1" i="0" lang="zh-CN" dirty="0">
-                <a:solidFill>
-                  <a:srgbClr val="2B3E57"/>
-                </a:solidFill>
-                <a:latin typeface="DejaVu Sans"/>
-                <a:ea typeface="DejaVu Sans"/>
-                <a:cs typeface="DejaVu Sans"/>
-              </a:defRPr>
-            </a:pPr>
-            <a:r>
-              <a:rPr sz="1499" b="1" i="0" lang="zh-CN" dirty="0">
-                <a:solidFill>
-                  <a:srgbClr val="2B3E57"/>
-                </a:solidFill>
-                <a:latin typeface="DejaVu Sans"/>
-                <a:ea typeface="DejaVu Sans"/>
-                <a:cs typeface="DejaVu Sans"/>
-              </a:rPr>
-              <a:t>Evidence Boundary</a:t>
-            </a:r>
-          </a:p>
-        </p:txBody>
-      </p:sp>
-      <p:sp>
-        <p:nvSpPr>
-          <p:cNvPr id="89" name="l2_s" descr="Editable text; source id l2_s"/>
-          <p:cNvSpPr txBox="1"/>
-          <p:nvPr/>
-        </p:nvSpPr>
-        <p:spPr>
-          <a:xfrm>
-            <a:off x="8524874" y="4246562"/>
-            <a:ext cx="2984499" cy="277812"/>
-          </a:xfrm>
-          <a:prstGeom prst="rect">
-            <a:avLst/>
-          </a:prstGeom>
-          <a:noFill/>
-          <a:effectLst/>
-        </p:spPr>
-        <p:txBody>
-          <a:bodyPr wrap="none" anchor="ctr" tIns="0" rIns="0" bIns="0" lIns="0" anchorCtr="0" vertOverflow="overflow">
-            <a:noAutofit/>
-          </a:bodyPr>
-          <a:lstStyle/>
-          <a:p>
-            <a:pPr algn="l" fontAlgn="base">
-              <a:lnSpc>
-                <a:spcPts val="1468"/>
-              </a:lnSpc>
-              <a:spcBef>
-                <a:spcPts val="0"/>
-              </a:spcBef>
-              <a:spcAft>
-                <a:spcPts val="0"/>
-              </a:spcAft>
-              <a:defRPr sz="1249" b="1" i="0" lang="zh-CN" dirty="0">
+              <a:defRPr sz="1499" b="0" i="0" lang="zh-CN" dirty="0">
                 <a:solidFill>
                   <a:srgbClr val="27303A"/>
                 </a:solidFill>
@@ -7372,7 +7436,7 @@
               </a:defRPr>
             </a:pPr>
             <a:r>
-              <a:rPr sz="1249" b="1" i="0" lang="zh-CN" dirty="0">
+              <a:rPr sz="1499" b="0" i="0" lang="zh-CN" dirty="0">
                 <a:solidFill>
                   <a:srgbClr val="27303A"/>
                 </a:solidFill>
@@ -7393,12 +7457,12 @@
         </p:nvSpPr>
         <p:spPr>
           <a:xfrm>
-            <a:off x="7778749" y="5635624"/>
-            <a:ext cx="3889374" cy="1587499"/>
+            <a:off x="7969249" y="6667499"/>
+            <a:ext cx="3889374" cy="1523999"/>
           </a:xfrm>
           <a:prstGeom prst="roundRect">
             <a:avLst>
-              <a:gd name="adj" fmla="val 4500"/>
+              <a:gd name="adj" fmla="val 4687"/>
             </a:avLst>
           </a:prstGeom>
           <a:solidFill>
@@ -7444,8 +7508,8 @@
         </p:nvSpPr>
         <p:spPr>
           <a:xfrm>
-            <a:off x="8151812" y="6095999"/>
-            <a:ext cx="119062" cy="119062"/>
+            <a:off x="8247062" y="7270749"/>
+            <a:ext cx="103187" cy="103187"/>
           </a:xfrm>
           <a:prstGeom prst="rect">
             <a:avLst/>
@@ -7488,8 +7552,8 @@
         </p:nvSpPr>
         <p:spPr>
           <a:xfrm>
-            <a:off x="8024812" y="6318249"/>
-            <a:ext cx="119062" cy="119062"/>
+            <a:off x="8135937" y="7469187"/>
+            <a:ext cx="103187" cy="103187"/>
           </a:xfrm>
           <a:prstGeom prst="rect">
             <a:avLst/>
@@ -7532,8 +7596,8 @@
         </p:nvSpPr>
         <p:spPr>
           <a:xfrm>
-            <a:off x="8286749" y="6318249"/>
-            <a:ext cx="119062" cy="119062"/>
+            <a:off x="8366124" y="7469187"/>
+            <a:ext cx="103187" cy="103187"/>
           </a:xfrm>
           <a:prstGeom prst="rect">
             <a:avLst/>
@@ -7576,8 +7640,8 @@
         </p:nvCxnSpPr>
         <p:spPr>
           <a:xfrm flipH="1">
-            <a:off x="8088312" y="6215062"/>
-            <a:ext cx="127000" cy="103187"/>
+            <a:off x="8191499" y="7373937"/>
+            <a:ext cx="111125" cy="95250"/>
           </a:xfrm>
           <a:prstGeom prst="line">
             <a:avLst/>
@@ -7612,8 +7676,8 @@
         </p:nvCxnSpPr>
         <p:spPr>
           <a:xfrm>
-            <a:off x="8215312" y="6215062"/>
-            <a:ext cx="127000" cy="103187"/>
+            <a:off x="8302624" y="7373937"/>
+            <a:ext cx="111125" cy="95250"/>
           </a:xfrm>
           <a:prstGeom prst="line">
             <a:avLst/>
@@ -7648,8 +7712,64 @@
         </p:nvSpPr>
         <p:spPr>
           <a:xfrm>
-            <a:off x="8524874" y="6111874"/>
-            <a:ext cx="2984499" cy="325437"/>
+            <a:off x="8572499" y="7080249"/>
+            <a:ext cx="3190874" cy="365124"/>
+          </a:xfrm>
+          <a:prstGeom prst="rect">
+            <a:avLst/>
+          </a:prstGeom>
+          <a:noFill/>
+          <a:effectLst/>
+        </p:spPr>
+        <p:txBody>
+          <a:bodyPr wrap="none" anchor="ctr" tIns="0" rIns="0" bIns="0" lIns="0" anchorCtr="0" vertOverflow="overflow">
+            <a:noAutofit/>
+          </a:bodyPr>
+          <a:lstStyle/>
+          <a:p>
+            <a:pPr algn="l" fontAlgn="base">
+              <a:lnSpc>
+                <a:spcPts val="1984"/>
+              </a:lnSpc>
+              <a:spcBef>
+                <a:spcPts val="0"/>
+              </a:spcBef>
+              <a:spcAft>
+                <a:spcPts val="0"/>
+              </a:spcAft>
+              <a:defRPr sz="1687" b="1" i="0" lang="zh-CN" dirty="0">
+                <a:solidFill>
+                  <a:srgbClr val="7A5410"/>
+                </a:solidFill>
+                <a:latin typeface="DejaVu Sans"/>
+                <a:ea typeface="DejaVu Sans"/>
+                <a:cs typeface="DejaVu Sans"/>
+              </a:defRPr>
+            </a:pPr>
+            <a:r>
+              <a:rPr sz="1687" b="1" i="0" lang="zh-CN" dirty="0">
+                <a:solidFill>
+                  <a:srgbClr val="7A5410"/>
+                </a:solidFill>
+                <a:latin typeface="DejaVu Sans"/>
+                <a:ea typeface="DejaVu Sans"/>
+                <a:cs typeface="DejaVu Sans"/>
+              </a:rPr>
+              <a:t>Ba5Y12Zn[O(SiO4)]8</a:t>
+            </a:r>
+          </a:p>
+        </p:txBody>
+      </p:sp>
+      <p:sp>
+        <p:nvSpPr>
+          <p:cNvPr id="97" name="l3_s" descr="Editable text; source id l3_s"/>
+          <p:cNvSpPr txBox="1"/>
+          <p:nvPr/>
+        </p:nvSpPr>
+        <p:spPr>
+          <a:xfrm>
+            <a:off x="8572499" y="7461249"/>
+            <a:ext cx="3190874" cy="317499"/>
           </a:xfrm>
           <a:prstGeom prst="rect">
             <a:avLst/>
@@ -7673,63 +7793,7 @@
               <a:spcAft>
                 <a:spcPts val="0"/>
               </a:spcAft>
-              <a:defRPr sz="1499" b="1" i="0" lang="zh-CN" dirty="0">
-                <a:solidFill>
-                  <a:srgbClr val="7A5410"/>
-                </a:solidFill>
-                <a:latin typeface="DejaVu Sans"/>
-                <a:ea typeface="DejaVu Sans"/>
-                <a:cs typeface="DejaVu Sans"/>
-              </a:defRPr>
-            </a:pPr>
-            <a:r>
-              <a:rPr sz="1499" b="1" i="0" lang="zh-CN" dirty="0">
-                <a:solidFill>
-                  <a:srgbClr val="7A5410"/>
-                </a:solidFill>
-                <a:latin typeface="DejaVu Sans"/>
-                <a:ea typeface="DejaVu Sans"/>
-                <a:cs typeface="DejaVu Sans"/>
-              </a:rPr>
-              <a:t>Ba5Y12Zn[O(SiO4)]8</a:t>
-            </a:r>
-          </a:p>
-        </p:txBody>
-      </p:sp>
-      <p:sp>
-        <p:nvSpPr>
-          <p:cNvPr id="97" name="l3_s" descr="Editable text; source id l3_s"/>
-          <p:cNvSpPr txBox="1"/>
-          <p:nvPr/>
-        </p:nvSpPr>
-        <p:spPr>
-          <a:xfrm>
-            <a:off x="8524874" y="6469062"/>
-            <a:ext cx="2984499" cy="277812"/>
-          </a:xfrm>
-          <a:prstGeom prst="rect">
-            <a:avLst/>
-          </a:prstGeom>
-          <a:noFill/>
-          <a:effectLst/>
-        </p:spPr>
-        <p:txBody>
-          <a:bodyPr wrap="none" anchor="ctr" tIns="0" rIns="0" bIns="0" lIns="0" anchorCtr="0" vertOverflow="overflow">
-            <a:noAutofit/>
-          </a:bodyPr>
-          <a:lstStyle/>
-          <a:p>
-            <a:pPr algn="l" fontAlgn="base">
-              <a:lnSpc>
-                <a:spcPts val="1468"/>
-              </a:lnSpc>
-              <a:spcBef>
-                <a:spcPts val="0"/>
-              </a:spcBef>
-              <a:spcAft>
-                <a:spcPts val="0"/>
-              </a:spcAft>
-              <a:defRPr sz="1249" b="1" i="0" lang="zh-CN" dirty="0">
+              <a:defRPr sz="1499" b="0" i="0" lang="zh-CN" dirty="0">
                 <a:solidFill>
                   <a:srgbClr val="27303A"/>
                 </a:solidFill>
@@ -7739,7 +7803,7 @@
               </a:defRPr>
             </a:pPr>
             <a:r>
-              <a:rPr sz="1249" b="1" i="0" lang="zh-CN" dirty="0">
+              <a:rPr sz="1499" b="0" i="0" lang="zh-CN" dirty="0">
                 <a:solidFill>
                   <a:srgbClr val="27303A"/>
                 </a:solidFill>
@@ -7760,8 +7824,8 @@
         </p:nvCxnSpPr>
         <p:spPr>
           <a:xfrm flipH="1">
-            <a:off x="4762499" y="4063999"/>
-            <a:ext cx="428625" cy="0"/>
+            <a:off x="4317999" y="4706937"/>
+            <a:ext cx="452438" cy="0"/>
           </a:xfrm>
           <a:prstGeom prst="line">
             <a:avLst/>
@@ -7796,8 +7860,8 @@
         </p:nvCxnSpPr>
         <p:spPr>
           <a:xfrm>
-            <a:off x="4762499" y="1650999"/>
-            <a:ext cx="0" cy="5000625"/>
+            <a:off x="4317999" y="1897062"/>
+            <a:ext cx="0" cy="5619750"/>
           </a:xfrm>
           <a:prstGeom prst="line">
             <a:avLst/>
@@ -7832,8 +7896,8 @@
         </p:nvSpPr>
         <p:spPr>
           <a:xfrm>
-            <a:off x="4206875" y="1603375"/>
-            <a:ext cx="555625" cy="95250"/>
+            <a:off x="3587750" y="1849437"/>
+            <a:ext cx="730250" cy="95250"/>
           </a:xfrm>
           <a:custGeom>
             <a:avLst/>
@@ -7842,9 +7906,9 @@
             <a:cxnLst/>
             <a:rect l="l" t="t" r="r" b="b"/>
             <a:pathLst>
-              <a:path w="70000" h="12000">
+              <a:path w="92000" h="12000">
                 <a:moveTo>
-                  <a:pt x="70000" y="7250"/>
+                  <a:pt x="92000" y="7250"/>
                 </a:moveTo>
                 <a:lnTo>
                   <a:pt x="15000" y="7250"/>
@@ -7862,7 +7926,7 @@
                   <a:pt x="15000" y="4750"/>
                 </a:lnTo>
                 <a:lnTo>
-                  <a:pt x="70000" y="4750"/>
+                  <a:pt x="92000" y="4750"/>
                 </a:lnTo>
                 <a:close/>
               </a:path>
@@ -7906,8 +7970,8 @@
         </p:nvSpPr>
         <p:spPr>
           <a:xfrm>
-            <a:off x="3984624" y="1206499"/>
-            <a:ext cx="992187" cy="309562"/>
+            <a:off x="2873374" y="793749"/>
+            <a:ext cx="1341437" cy="380999"/>
           </a:xfrm>
           <a:prstGeom prst="roundRect">
             <a:avLst>
@@ -7954,8 +8018,8 @@
         </p:nvSpPr>
         <p:spPr>
           <a:xfrm>
-            <a:off x="4063999" y="1238249"/>
-            <a:ext cx="833437" cy="246062"/>
+            <a:off x="2952749" y="825499"/>
+            <a:ext cx="1182687" cy="317499"/>
           </a:xfrm>
           <a:prstGeom prst="rect">
             <a:avLst/>
@@ -7971,7 +8035,7 @@
           <a:p>
             <a:pPr algn="ctr" fontAlgn="base">
               <a:lnSpc>
-                <a:spcPts val="1187"/>
+                <a:spcPts val="1765"/>
               </a:lnSpc>
               <a:spcBef>
                 <a:spcPts val="0"/>
@@ -7979,7 +8043,7 @@
               <a:spcAft>
                 <a:spcPts val="0"/>
               </a:spcAft>
-              <a:defRPr sz="999" b="1" i="0" lang="zh-CN" dirty="0">
+              <a:defRPr sz="1499" b="0" i="0" lang="zh-CN" dirty="0">
                 <a:solidFill>
                   <a:srgbClr val="27303A"/>
                 </a:solidFill>
@@ -7989,7 +8053,7 @@
               </a:defRPr>
             </a:pPr>
             <a:r>
-              <a:rPr sz="999" b="1" i="0" lang="zh-CN" dirty="0">
+              <a:rPr sz="1499" b="0" i="0" lang="zh-CN" dirty="0">
                 <a:solidFill>
                   <a:srgbClr val="27303A"/>
                 </a:solidFill>
@@ -8010,8 +8074,8 @@
         </p:nvSpPr>
         <p:spPr>
           <a:xfrm>
-            <a:off x="4206875" y="3270250"/>
-            <a:ext cx="555625" cy="95250"/>
+            <a:off x="3587750" y="3722687"/>
+            <a:ext cx="730250" cy="95250"/>
           </a:xfrm>
           <a:custGeom>
             <a:avLst/>
@@ -8020,9 +8084,9 @@
             <a:cxnLst/>
             <a:rect l="l" t="t" r="r" b="b"/>
             <a:pathLst>
-              <a:path w="70000" h="12000">
+              <a:path w="92000" h="12000">
                 <a:moveTo>
-                  <a:pt x="70000" y="7250"/>
+                  <a:pt x="92000" y="7250"/>
                 </a:moveTo>
                 <a:lnTo>
                   <a:pt x="15000" y="7250"/>
@@ -8040,7 +8104,7 @@
                   <a:pt x="15000" y="4750"/>
                 </a:lnTo>
                 <a:lnTo>
-                  <a:pt x="70000" y="4750"/>
+                  <a:pt x="92000" y="4750"/>
                 </a:lnTo>
                 <a:close/>
               </a:path>
@@ -8084,8 +8148,8 @@
         </p:nvSpPr>
         <p:spPr>
           <a:xfrm>
-            <a:off x="3905249" y="2873374"/>
-            <a:ext cx="1150937" cy="309562"/>
+            <a:off x="2635249" y="2643187"/>
+            <a:ext cx="1579562" cy="380999"/>
           </a:xfrm>
           <a:prstGeom prst="roundRect">
             <a:avLst>
@@ -8132,8 +8196,8 @@
         </p:nvSpPr>
         <p:spPr>
           <a:xfrm>
-            <a:off x="3984624" y="2905124"/>
-            <a:ext cx="992187" cy="246062"/>
+            <a:off x="2714624" y="2674937"/>
+            <a:ext cx="1420812" cy="317499"/>
           </a:xfrm>
           <a:prstGeom prst="rect">
             <a:avLst/>
@@ -8149,7 +8213,7 @@
           <a:p>
             <a:pPr algn="ctr" fontAlgn="base">
               <a:lnSpc>
-                <a:spcPts val="1187"/>
+                <a:spcPts val="1765"/>
               </a:lnSpc>
               <a:spcBef>
                 <a:spcPts val="0"/>
@@ -8157,7 +8221,7 @@
               <a:spcAft>
                 <a:spcPts val="0"/>
               </a:spcAft>
-              <a:defRPr sz="999" b="1" i="0" lang="zh-CN" dirty="0">
+              <a:defRPr sz="1499" b="0" i="0" lang="zh-CN" dirty="0">
                 <a:solidFill>
                   <a:srgbClr val="27303A"/>
                 </a:solidFill>
@@ -8167,7 +8231,7 @@
               </a:defRPr>
             </a:pPr>
             <a:r>
-              <a:rPr sz="999" b="1" i="0" lang="zh-CN" dirty="0">
+              <a:rPr sz="1499" b="0" i="0" lang="zh-CN" dirty="0">
                 <a:solidFill>
                   <a:srgbClr val="27303A"/>
                 </a:solidFill>
@@ -8188,8 +8252,8 @@
         </p:nvSpPr>
         <p:spPr>
           <a:xfrm>
-            <a:off x="4206875" y="4937125"/>
-            <a:ext cx="555625" cy="95250"/>
+            <a:off x="3587750" y="5595937"/>
+            <a:ext cx="730250" cy="95250"/>
           </a:xfrm>
           <a:custGeom>
             <a:avLst/>
@@ -8198,9 +8262,9 @@
             <a:cxnLst/>
             <a:rect l="l" t="t" r="r" b="b"/>
             <a:pathLst>
-              <a:path w="70000" h="12000">
+              <a:path w="92000" h="12000">
                 <a:moveTo>
-                  <a:pt x="70000" y="7250"/>
+                  <a:pt x="92000" y="7250"/>
                 </a:moveTo>
                 <a:lnTo>
                   <a:pt x="15000" y="7250"/>
@@ -8218,7 +8282,7 @@
                   <a:pt x="15000" y="4750"/>
                 </a:lnTo>
                 <a:lnTo>
-                  <a:pt x="70000" y="4750"/>
+                  <a:pt x="92000" y="4750"/>
                 </a:lnTo>
                 <a:close/>
               </a:path>
@@ -8262,8 +8326,8 @@
         </p:nvSpPr>
         <p:spPr>
           <a:xfrm>
-            <a:off x="3984624" y="4540249"/>
-            <a:ext cx="992187" cy="309562"/>
+            <a:off x="2873374" y="4516437"/>
+            <a:ext cx="1341437" cy="380999"/>
           </a:xfrm>
           <a:prstGeom prst="roundRect">
             <a:avLst>
@@ -8310,8 +8374,8 @@
         </p:nvSpPr>
         <p:spPr>
           <a:xfrm>
-            <a:off x="4063999" y="4571999"/>
-            <a:ext cx="833437" cy="246062"/>
+            <a:off x="2952749" y="4548187"/>
+            <a:ext cx="1182687" cy="317499"/>
           </a:xfrm>
           <a:prstGeom prst="rect">
             <a:avLst/>
@@ -8327,7 +8391,7 @@
           <a:p>
             <a:pPr algn="ctr" fontAlgn="base">
               <a:lnSpc>
-                <a:spcPts val="1187"/>
+                <a:spcPts val="1765"/>
               </a:lnSpc>
               <a:spcBef>
                 <a:spcPts val="0"/>
@@ -8335,7 +8399,7 @@
               <a:spcAft>
                 <a:spcPts val="0"/>
               </a:spcAft>
-              <a:defRPr sz="999" b="1" i="0" lang="zh-CN" dirty="0">
+              <a:defRPr sz="1499" b="0" i="0" lang="zh-CN" dirty="0">
                 <a:solidFill>
                   <a:srgbClr val="27303A"/>
                 </a:solidFill>
@@ -8345,7 +8409,7 @@
               </a:defRPr>
             </a:pPr>
             <a:r>
-              <a:rPr sz="999" b="1" i="0" lang="zh-CN" dirty="0">
+              <a:rPr sz="1499" b="0" i="0" lang="zh-CN" dirty="0">
                 <a:solidFill>
                   <a:srgbClr val="27303A"/>
                 </a:solidFill>
@@ -8366,8 +8430,8 @@
         </p:nvSpPr>
         <p:spPr>
           <a:xfrm>
-            <a:off x="4206875" y="6604000"/>
-            <a:ext cx="555625" cy="95250"/>
+            <a:off x="3587750" y="7469187"/>
+            <a:ext cx="730250" cy="95250"/>
           </a:xfrm>
           <a:custGeom>
             <a:avLst/>
@@ -8376,9 +8440,9 @@
             <a:cxnLst/>
             <a:rect l="l" t="t" r="r" b="b"/>
             <a:pathLst>
-              <a:path w="70000" h="12000">
+              <a:path w="92000" h="12000">
                 <a:moveTo>
-                  <a:pt x="70000" y="7250"/>
+                  <a:pt x="92000" y="7250"/>
                 </a:moveTo>
                 <a:lnTo>
                   <a:pt x="15000" y="7250"/>
@@ -8396,7 +8460,7 @@
                   <a:pt x="15000" y="4750"/>
                 </a:lnTo>
                 <a:lnTo>
-                  <a:pt x="70000" y="4750"/>
+                  <a:pt x="92000" y="4750"/>
                 </a:lnTo>
                 <a:close/>
               </a:path>
@@ -8440,8 +8504,8 @@
         </p:nvSpPr>
         <p:spPr>
           <a:xfrm>
-            <a:off x="3754437" y="6207124"/>
-            <a:ext cx="1460499" cy="309562"/>
+            <a:off x="2158999" y="6389687"/>
+            <a:ext cx="2055812" cy="380999"/>
           </a:xfrm>
           <a:prstGeom prst="roundRect">
             <a:avLst>
@@ -8488,8 +8552,8 @@
         </p:nvSpPr>
         <p:spPr>
           <a:xfrm>
-            <a:off x="3833812" y="6238874"/>
-            <a:ext cx="1301749" cy="246062"/>
+            <a:off x="2238374" y="6421437"/>
+            <a:ext cx="1897062" cy="317499"/>
           </a:xfrm>
           <a:prstGeom prst="rect">
             <a:avLst/>
@@ -8505,7 +8569,7 @@
           <a:p>
             <a:pPr algn="ctr" fontAlgn="base">
               <a:lnSpc>
-                <a:spcPts val="1187"/>
+                <a:spcPts val="1765"/>
               </a:lnSpc>
               <a:spcBef>
                 <a:spcPts val="0"/>
@@ -8513,7 +8577,7 @@
               <a:spcAft>
                 <a:spcPts val="0"/>
               </a:spcAft>
-              <a:defRPr sz="999" b="1" i="0" lang="zh-CN" dirty="0">
+              <a:defRPr sz="1499" b="0" i="0" lang="zh-CN" dirty="0">
                 <a:solidFill>
                   <a:srgbClr val="27303A"/>
                 </a:solidFill>
@@ -8523,7 +8587,7 @@
               </a:defRPr>
             </a:pPr>
             <a:r>
-              <a:rPr sz="999" b="1" i="0" lang="zh-CN" dirty="0">
+              <a:rPr sz="1499" b="0" i="0" lang="zh-CN" dirty="0">
                 <a:solidFill>
                   <a:srgbClr val="27303A"/>
                 </a:solidFill>
@@ -8544,8 +8608,8 @@
         </p:nvCxnSpPr>
         <p:spPr>
           <a:xfrm>
-            <a:off x="7000874" y="4063999"/>
-            <a:ext cx="142875" cy="0"/>
+            <a:off x="6754812" y="4706937"/>
+            <a:ext cx="452437" cy="0"/>
           </a:xfrm>
           <a:prstGeom prst="line">
             <a:avLst/>
@@ -8580,8 +8644,8 @@
         </p:nvCxnSpPr>
         <p:spPr>
           <a:xfrm>
-            <a:off x="7143749" y="1984374"/>
-            <a:ext cx="0" cy="4445000"/>
+            <a:off x="7207249" y="1984374"/>
+            <a:ext cx="0" cy="5445125"/>
           </a:xfrm>
           <a:prstGeom prst="line">
             <a:avLst/>
@@ -8616,8 +8680,8 @@
         </p:nvSpPr>
         <p:spPr>
           <a:xfrm>
-            <a:off x="7143750" y="1936750"/>
-            <a:ext cx="603250" cy="95250"/>
+            <a:off x="7207250" y="1936750"/>
+            <a:ext cx="730250" cy="95250"/>
           </a:xfrm>
           <a:custGeom>
             <a:avLst/>
@@ -8626,24 +8690,24 @@
             <a:cxnLst/>
             <a:rect l="l" t="t" r="r" b="b"/>
             <a:pathLst>
-              <a:path w="76000" h="12000">
+              <a:path w="92000" h="12000">
                 <a:moveTo>
                   <a:pt x="0" y="4750"/>
                 </a:moveTo>
                 <a:lnTo>
-                  <a:pt x="61000" y="4750"/>
+                  <a:pt x="77000" y="4750"/>
                 </a:lnTo>
                 <a:lnTo>
-                  <a:pt x="61000" y="0"/>
+                  <a:pt x="77000" y="0"/>
                 </a:lnTo>
                 <a:lnTo>
-                  <a:pt x="76000" y="6000"/>
+                  <a:pt x="92000" y="6000"/>
                 </a:lnTo>
                 <a:lnTo>
-                  <a:pt x="61000" y="12000"/>
+                  <a:pt x="77000" y="12000"/>
                 </a:lnTo>
                 <a:lnTo>
-                  <a:pt x="61000" y="7250"/>
+                  <a:pt x="77000" y="7250"/>
                 </a:lnTo>
                 <a:lnTo>
                   <a:pt x="0" y="7250"/>
@@ -8690,8 +8754,8 @@
         </p:nvSpPr>
         <p:spPr>
           <a:xfrm>
-            <a:off x="6953249" y="1539874"/>
-            <a:ext cx="992187" cy="309562"/>
+            <a:off x="7318374" y="793749"/>
+            <a:ext cx="1341437" cy="380999"/>
           </a:xfrm>
           <a:prstGeom prst="roundRect">
             <a:avLst>
@@ -8738,8 +8802,8 @@
         </p:nvSpPr>
         <p:spPr>
           <a:xfrm>
-            <a:off x="7032624" y="1571624"/>
-            <a:ext cx="833437" cy="246062"/>
+            <a:off x="7397749" y="825499"/>
+            <a:ext cx="1182687" cy="317499"/>
           </a:xfrm>
           <a:prstGeom prst="rect">
             <a:avLst/>
@@ -8755,7 +8819,7 @@
           <a:p>
             <a:pPr algn="ctr" fontAlgn="base">
               <a:lnSpc>
-                <a:spcPts val="1187"/>
+                <a:spcPts val="1765"/>
               </a:lnSpc>
               <a:spcBef>
                 <a:spcPts val="0"/>
@@ -8763,7 +8827,7 @@
               <a:spcAft>
                 <a:spcPts val="0"/>
               </a:spcAft>
-              <a:defRPr sz="999" b="1" i="0" lang="zh-CN" dirty="0">
+              <a:defRPr sz="1499" b="0" i="0" lang="zh-CN" dirty="0">
                 <a:solidFill>
                   <a:srgbClr val="27303A"/>
                 </a:solidFill>
@@ -8773,7 +8837,7 @@
               </a:defRPr>
             </a:pPr>
             <a:r>
-              <a:rPr sz="999" b="1" i="0" lang="zh-CN" dirty="0">
+              <a:rPr sz="1499" b="0" i="0" lang="zh-CN" dirty="0">
                 <a:solidFill>
                   <a:srgbClr val="27303A"/>
                 </a:solidFill>
@@ -8794,8 +8858,8 @@
         </p:nvSpPr>
         <p:spPr>
           <a:xfrm>
-            <a:off x="7143750" y="4159250"/>
-            <a:ext cx="603250" cy="95250"/>
+            <a:off x="7207250" y="4659312"/>
+            <a:ext cx="730250" cy="95250"/>
           </a:xfrm>
           <a:custGeom>
             <a:avLst/>
@@ -8804,24 +8868,24 @@
             <a:cxnLst/>
             <a:rect l="l" t="t" r="r" b="b"/>
             <a:pathLst>
-              <a:path w="76000" h="12000">
+              <a:path w="92000" h="12000">
                 <a:moveTo>
                   <a:pt x="0" y="4750"/>
                 </a:moveTo>
                 <a:lnTo>
-                  <a:pt x="61000" y="4750"/>
+                  <a:pt x="77000" y="4750"/>
                 </a:lnTo>
                 <a:lnTo>
-                  <a:pt x="61000" y="0"/>
+                  <a:pt x="77000" y="0"/>
                 </a:lnTo>
                 <a:lnTo>
-                  <a:pt x="76000" y="6000"/>
+                  <a:pt x="92000" y="6000"/>
                 </a:lnTo>
                 <a:lnTo>
-                  <a:pt x="61000" y="12000"/>
+                  <a:pt x="77000" y="12000"/>
                 </a:lnTo>
                 <a:lnTo>
-                  <a:pt x="61000" y="7250"/>
+                  <a:pt x="77000" y="7250"/>
                 </a:lnTo>
                 <a:lnTo>
                   <a:pt x="0" y="7250"/>
@@ -8868,8 +8932,8 @@
         </p:nvSpPr>
         <p:spPr>
           <a:xfrm>
-            <a:off x="6754812" y="3762374"/>
-            <a:ext cx="1381124" cy="309562"/>
+            <a:off x="7318374" y="3492499"/>
+            <a:ext cx="1936749" cy="380999"/>
           </a:xfrm>
           <a:prstGeom prst="roundRect">
             <a:avLst>
@@ -8916,8 +8980,8 @@
         </p:nvSpPr>
         <p:spPr>
           <a:xfrm>
-            <a:off x="6834187" y="3794124"/>
-            <a:ext cx="1222374" cy="246062"/>
+            <a:off x="7397749" y="3524249"/>
+            <a:ext cx="1777999" cy="317499"/>
           </a:xfrm>
           <a:prstGeom prst="rect">
             <a:avLst/>
@@ -8933,7 +8997,7 @@
           <a:p>
             <a:pPr algn="ctr" fontAlgn="base">
               <a:lnSpc>
-                <a:spcPts val="1187"/>
+                <a:spcPts val="1765"/>
               </a:lnSpc>
               <a:spcBef>
                 <a:spcPts val="0"/>
@@ -8941,7 +9005,7 @@
               <a:spcAft>
                 <a:spcPts val="0"/>
               </a:spcAft>
-              <a:defRPr sz="999" b="1" i="0" lang="zh-CN" dirty="0">
+              <a:defRPr sz="1499" b="0" i="0" lang="zh-CN" dirty="0">
                 <a:solidFill>
                   <a:srgbClr val="27303A"/>
                 </a:solidFill>
@@ -8951,7 +9015,7 @@
               </a:defRPr>
             </a:pPr>
             <a:r>
-              <a:rPr sz="999" b="1" i="0" lang="zh-CN" dirty="0">
+              <a:rPr sz="1499" b="0" i="0" lang="zh-CN" dirty="0">
                 <a:solidFill>
                   <a:srgbClr val="27303A"/>
                 </a:solidFill>
@@ -8972,8 +9036,8 @@
         </p:nvCxnSpPr>
         <p:spPr>
           <a:xfrm>
-            <a:off x="7143749" y="6429374"/>
-            <a:ext cx="603250" cy="0"/>
+            <a:off x="7207249" y="7429499"/>
+            <a:ext cx="730250" cy="0"/>
           </a:xfrm>
           <a:prstGeom prst="line">
             <a:avLst/>
@@ -9012,8 +9076,8 @@
         </p:nvSpPr>
         <p:spPr>
           <a:xfrm>
-            <a:off x="7032624" y="5984874"/>
-            <a:ext cx="833437" cy="309562"/>
+            <a:off x="7318374" y="6215062"/>
+            <a:ext cx="1111249" cy="380999"/>
           </a:xfrm>
           <a:prstGeom prst="roundRect">
             <a:avLst>
@@ -9060,8 +9124,8 @@
         </p:nvSpPr>
         <p:spPr>
           <a:xfrm>
-            <a:off x="7111999" y="6016624"/>
-            <a:ext cx="674687" cy="246062"/>
+            <a:off x="7397749" y="6246812"/>
+            <a:ext cx="952499" cy="317499"/>
           </a:xfrm>
           <a:prstGeom prst="rect">
             <a:avLst/>
@@ -9077,7 +9141,7 @@
           <a:p>
             <a:pPr algn="ctr" fontAlgn="base">
               <a:lnSpc>
-                <a:spcPts val="1187"/>
+                <a:spcPts val="1765"/>
               </a:lnSpc>
               <a:spcBef>
                 <a:spcPts val="0"/>
@@ -9085,7 +9149,7 @@
               <a:spcAft>
                 <a:spcPts val="0"/>
               </a:spcAft>
-              <a:defRPr sz="999" b="1" i="0" lang="zh-CN" dirty="0">
+              <a:defRPr sz="1499" b="0" i="0" lang="zh-CN" dirty="0">
                 <a:solidFill>
                   <a:srgbClr val="7A5410"/>
                 </a:solidFill>
@@ -9095,7 +9159,7 @@
               </a:defRPr>
             </a:pPr>
             <a:r>
-              <a:rPr sz="999" b="1" i="0" lang="zh-CN" dirty="0">
+              <a:rPr sz="1499" b="0" i="0" lang="zh-CN" dirty="0">
                 <a:solidFill>
                   <a:srgbClr val="7A5410"/>
                 </a:solidFill>
